--- a/docs/路演PPT.pptx
+++ b/docs/路演PPT.pptx
@@ -1302,7 +1302,7 @@
     <p:bg>
       <p:bgPr>
         <a:solidFill>
-          <a:srgbClr val="0F1419"/>
+          <a:srgbClr val="1E2530"/>
         </a:solidFill>
       </p:bgPr>
     </p:bg>
@@ -1347,13 +1347,13 @@
             <a:r>
               <a:rPr lang="en-US" sz="1100" dirty="0">
                 <a:solidFill>
-                  <a:srgbClr val="8A8A8A"/>
-                </a:solidFill>
-                <a:latin typeface="Microsoft YaHei" pitchFamily="34" charset="0"/>
-                <a:ea typeface="Microsoft YaHei" pitchFamily="34" charset="-122"/>
-                <a:cs typeface="Microsoft YaHei" pitchFamily="34" charset="-120"/>
-              </a:rPr>
-              <a:t>第9组 · 曹骏越 · 路演</a:t>
+                  <a:srgbClr val="9CA3AF"/>
+                </a:solidFill>
+                <a:latin typeface="Microsoft YaHei" pitchFamily="34" charset="0"/>
+                <a:ea typeface="Microsoft YaHei" pitchFamily="34" charset="-122"/>
+                <a:cs typeface="Microsoft YaHei" pitchFamily="34" charset="-120"/>
+              </a:rPr>
+              <a:t>第9组·曹骏越·路演</a:t>
             </a:r>
             <a:endParaRPr lang="en-US" sz="1100" dirty="0"/>
           </a:p>
@@ -1386,7 +1386,7 @@
             <a:r>
               <a:rPr lang="en-US" sz="4000" b="1" dirty="0">
                 <a:solidFill>
-                  <a:srgbClr val="E6E6E6"/>
+                  <a:srgbClr val="D4D4D8"/>
                 </a:solidFill>
                 <a:latin typeface="Microsoft YaHei" pitchFamily="34" charset="0"/>
                 <a:ea typeface="Microsoft YaHei" pitchFamily="34" charset="-122"/>
@@ -1425,7 +1425,7 @@
             <a:r>
               <a:rPr lang="en-US" sz="2000" dirty="0">
                 <a:solidFill>
-                  <a:srgbClr val="E6E6E6"/>
+                  <a:srgbClr val="D4D4D8"/>
                 </a:solidFill>
                 <a:latin typeface="Microsoft YaHei" pitchFamily="34" charset="0"/>
                 <a:ea typeface="Microsoft YaHei" pitchFamily="34" charset="-122"/>
@@ -1464,7 +1464,7 @@
             <a:r>
               <a:rPr lang="en-US" sz="1200" dirty="0">
                 <a:solidFill>
-                  <a:srgbClr val="4DD0A7"/>
+                  <a:srgbClr val="A3B899"/>
                 </a:solidFill>
                 <a:latin typeface="Consolas" pitchFamily="34" charset="0"/>
                 <a:ea typeface="Consolas" pitchFamily="34" charset="-122"/>
@@ -1503,13 +1503,13 @@
             <a:r>
               <a:rPr lang="en-US" sz="1000" dirty="0">
                 <a:solidFill>
-                  <a:srgbClr val="8A8A8A"/>
-                </a:solidFill>
-                <a:latin typeface="Microsoft YaHei" pitchFamily="34" charset="0"/>
-                <a:ea typeface="Microsoft YaHei" pitchFamily="34" charset="-122"/>
-                <a:cs typeface="Microsoft YaHei" pitchFamily="34" charset="-120"/>
-              </a:rPr>
-              <a:t>Node 22 原生 http  |  node:sqlite  |  Cloudflare Pages + D1  |  零 npm 依赖</a:t>
+                  <a:srgbClr val="9CA3AF"/>
+                </a:solidFill>
+                <a:latin typeface="Microsoft YaHei" pitchFamily="34" charset="0"/>
+                <a:ea typeface="Microsoft YaHei" pitchFamily="34" charset="-122"/>
+                <a:cs typeface="Microsoft YaHei" pitchFamily="34" charset="-120"/>
+              </a:rPr>
+              <a:t>Node 22原生http | node:sqlite | Cloudflare Pages+D1 | 零npm依赖</a:t>
             </a:r>
             <a:endParaRPr lang="en-US" sz="1000" dirty="0"/>
           </a:p>
@@ -1542,13 +1542,13 @@
             <a:r>
               <a:rPr lang="en-US" sz="1100" i="1" dirty="0">
                 <a:solidFill>
-                  <a:srgbClr val="8A8A8A"/>
-                </a:solidFill>
-                <a:latin typeface="Microsoft YaHei" pitchFamily="34" charset="0"/>
-                <a:ea typeface="Microsoft YaHei" pitchFamily="34" charset="-122"/>
-                <a:cs typeface="Microsoft YaHei" pitchFamily="34" charset="-120"/>
-              </a:rPr>
-              <a:t>5 个关键问题 · 5 个闭环解决方案</a:t>
+                  <a:srgbClr val="9CA3AF"/>
+                </a:solidFill>
+                <a:latin typeface="Microsoft YaHei" pitchFamily="34" charset="0"/>
+                <a:ea typeface="Microsoft YaHei" pitchFamily="34" charset="-122"/>
+                <a:cs typeface="Microsoft YaHei" pitchFamily="34" charset="-120"/>
+              </a:rPr>
+              <a:t>5个关键问题·5个闭环解决方案</a:t>
             </a:r>
             <a:endParaRPr lang="en-US" sz="1100" dirty="0"/>
           </a:p>
@@ -1568,7 +1568,7 @@
     <p:bg>
       <p:bgPr>
         <a:solidFill>
-          <a:srgbClr val="0F1419"/>
+          <a:srgbClr val="1E2530"/>
         </a:solidFill>
       </p:bgPr>
     </p:bg>
@@ -1613,7 +1613,7 @@
             <a:r>
               <a:rPr lang="en-US" sz="2400" b="1" dirty="0">
                 <a:solidFill>
-                  <a:srgbClr val="4DD0A7"/>
+                  <a:srgbClr val="A3B899"/>
                 </a:solidFill>
                 <a:latin typeface="Microsoft YaHei" pitchFamily="34" charset="0"/>
                 <a:ea typeface="Microsoft YaHei" pitchFamily="34" charset="-122"/>
@@ -1640,11 +1640,11 @@
             <a:avLst/>
           </a:prstGeom>
           <a:solidFill>
-            <a:srgbClr val="2A1A1A"/>
+            <a:srgbClr val="2D2828"/>
           </a:solidFill>
           <a:ln w="12700">
             <a:solidFill>
-              <a:srgbClr val="FF6B6B"/>
+              <a:srgbClr val="D4A5A5"/>
             </a:solidFill>
             <a:prstDash val="solid"/>
           </a:ln>
@@ -1671,13 +1671,13 @@
           <a:bodyPr wrap="square" rtlCol="0" anchor="ctr"/>
           <a:lstStyle/>
           <a:p>
-            <a:pPr algn="l" indent="0" marL="0">
+            <a:pPr indent="0" marL="0">
               <a:buNone/>
             </a:pPr>
             <a:r>
               <a:rPr lang="en-US" sz="1000" b="1" dirty="0">
                 <a:solidFill>
-                  <a:srgbClr val="FF6B6B"/>
+                  <a:srgbClr val="D4A5A5"/>
                 </a:solidFill>
                 <a:latin typeface="Microsoft YaHei" pitchFamily="34" charset="0"/>
                 <a:ea typeface="Microsoft YaHei" pitchFamily="34" charset="-122"/>
@@ -1710,19 +1710,19 @@
           <a:bodyPr wrap="square" rtlCol="0" anchor="ctr"/>
           <a:lstStyle/>
           <a:p>
-            <a:pPr algn="l" indent="0" marL="0">
+            <a:pPr indent="0" marL="0">
               <a:buNone/>
             </a:pPr>
             <a:r>
               <a:rPr lang="en-US" sz="1300" b="1" dirty="0">
                 <a:solidFill>
-                  <a:srgbClr val="E6E6E6"/>
-                </a:solidFill>
-                <a:latin typeface="Microsoft YaHei" pitchFamily="34" charset="0"/>
-                <a:ea typeface="Microsoft YaHei" pitchFamily="34" charset="-122"/>
-                <a:cs typeface="Microsoft YaHei" pitchFamily="34" charset="-120"/>
-              </a:rPr>
-              <a:t>Sealos / Render 免费层不可用</a:t>
+                  <a:srgbClr val="D4D4D8"/>
+                </a:solidFill>
+                <a:latin typeface="Microsoft YaHei" pitchFamily="34" charset="0"/>
+                <a:ea typeface="Microsoft YaHei" pitchFamily="34" charset="-122"/>
+                <a:cs typeface="Microsoft YaHei" pitchFamily="34" charset="-120"/>
+              </a:rPr>
+              <a:t>Sealos/Render免费层不可用</a:t>
             </a:r>
             <a:endParaRPr lang="en-US" sz="1300" dirty="0"/>
           </a:p>
@@ -1749,7 +1749,7 @@
           <a:bodyPr wrap="square" rtlCol="0" anchor="t"/>
           <a:lstStyle/>
           <a:p>
-            <a:pPr algn="l" indent="0" marL="0">
+            <a:pPr indent="0" marL="0">
               <a:lnSpc>
                 <a:spcPct val="120000"/>
               </a:lnSpc>
@@ -1758,18 +1758,143 @@
             <a:r>
               <a:rPr lang="en-US" sz="1000" dirty="0">
                 <a:solidFill>
-                  <a:srgbClr val="8A8A8A"/>
-                </a:solidFill>
-                <a:latin typeface="Microsoft YaHei" pitchFamily="34" charset="0"/>
-                <a:ea typeface="Microsoft YaHei" pitchFamily="34" charset="-122"/>
-                <a:cs typeface="Microsoft YaHei" pitchFamily="34" charset="-120"/>
-              </a:rPr>
-              <a:t>Sealos cloud.sealos.io 改版后创建项目流程与教程差距大、登录卡死；</a:t>
+                  <a:srgbClr val="9CA3AF"/>
+                </a:solidFill>
+                <a:latin typeface="Microsoft YaHei" pitchFamily="34" charset="0"/>
+                <a:ea typeface="Microsoft YaHei" pitchFamily="34" charset="-122"/>
+                <a:cs typeface="Microsoft YaHei" pitchFamily="34" charset="-120"/>
+              </a:rPr>
+              <a:t>Sealos改版后流程不匹配；Render免费层15分钟休眠，重启清库——预约数据回seed、访问计数归零。</a:t>
             </a:r>
             <a:endParaRPr lang="en-US" sz="1000" dirty="0"/>
           </a:p>
-          <a:p>
-            <a:pPr algn="l" indent="0" marL="0">
+        </p:txBody>
+      </p:sp>
+      <p:sp>
+        <p:nvSpPr>
+          <p:cNvPr id="7" name="Shape 5"/>
+          <p:cNvSpPr/>
+          <p:nvPr/>
+        </p:nvSpPr>
+        <p:spPr>
+          <a:xfrm>
+            <a:off x="4709160" y="1188720"/>
+            <a:ext cx="3977640" cy="3314700"/>
+          </a:xfrm>
+          <a:prstGeom prst="rect">
+            <a:avLst/>
+          </a:prstGeom>
+          <a:solidFill>
+            <a:srgbClr val="283142"/>
+          </a:solidFill>
+          <a:ln w="12700">
+            <a:solidFill>
+              <a:srgbClr val="A3B899"/>
+            </a:solidFill>
+            <a:prstDash val="solid"/>
+          </a:ln>
+        </p:spPr>
+      </p:sp>
+      <p:sp>
+        <p:nvSpPr>
+          <p:cNvPr id="8" name="Text 6"/>
+          <p:cNvSpPr/>
+          <p:nvPr/>
+        </p:nvSpPr>
+        <p:spPr>
+          <a:xfrm>
+            <a:off x="4846320" y="1280160"/>
+            <a:ext cx="3703320" cy="274320"/>
+          </a:xfrm>
+          <a:prstGeom prst="rect">
+            <a:avLst/>
+          </a:prstGeom>
+          <a:noFill/>
+          <a:ln/>
+        </p:spPr>
+        <p:txBody>
+          <a:bodyPr wrap="square" rtlCol="0" anchor="ctr"/>
+          <a:lstStyle/>
+          <a:p>
+            <a:pPr indent="0" marL="0">
+              <a:buNone/>
+            </a:pPr>
+            <a:r>
+              <a:rPr lang="en-US" sz="1000" b="1" dirty="0">
+                <a:solidFill>
+                  <a:srgbClr val="A3B899"/>
+                </a:solidFill>
+                <a:latin typeface="Microsoft YaHei" pitchFamily="34" charset="0"/>
+                <a:ea typeface="Microsoft YaHei" pitchFamily="34" charset="-122"/>
+                <a:cs typeface="Microsoft YaHei" pitchFamily="34" charset="-120"/>
+              </a:rPr>
+              <a:t>解决</a:t>
+            </a:r>
+            <a:endParaRPr lang="en-US" sz="1000" dirty="0"/>
+          </a:p>
+        </p:txBody>
+      </p:sp>
+      <p:sp>
+        <p:nvSpPr>
+          <p:cNvPr id="9" name="Text 7"/>
+          <p:cNvSpPr/>
+          <p:nvPr/>
+        </p:nvSpPr>
+        <p:spPr>
+          <a:xfrm>
+            <a:off x="4846320" y="1554480"/>
+            <a:ext cx="3703320" cy="320040"/>
+          </a:xfrm>
+          <a:prstGeom prst="rect">
+            <a:avLst/>
+          </a:prstGeom>
+          <a:noFill/>
+          <a:ln/>
+        </p:spPr>
+        <p:txBody>
+          <a:bodyPr wrap="square" rtlCol="0" anchor="ctr"/>
+          <a:lstStyle/>
+          <a:p>
+            <a:pPr indent="0" marL="0">
+              <a:buNone/>
+            </a:pPr>
+            <a:r>
+              <a:rPr lang="en-US" sz="1300" b="1" dirty="0">
+                <a:solidFill>
+                  <a:srgbClr val="D4D4D8"/>
+                </a:solidFill>
+                <a:latin typeface="Microsoft YaHei" pitchFamily="34" charset="0"/>
+                <a:ea typeface="Microsoft YaHei" pitchFamily="34" charset="-122"/>
+                <a:cs typeface="Microsoft YaHei" pitchFamily="34" charset="-120"/>
+              </a:rPr>
+              <a:t>改用Cloudflare Pages+Functions+D1</a:t>
+            </a:r>
+            <a:endParaRPr lang="en-US" sz="1300" dirty="0"/>
+          </a:p>
+        </p:txBody>
+      </p:sp>
+      <p:sp>
+        <p:nvSpPr>
+          <p:cNvPr id="10" name="Text 8"/>
+          <p:cNvSpPr/>
+          <p:nvPr/>
+        </p:nvSpPr>
+        <p:spPr>
+          <a:xfrm>
+            <a:off x="4846320" y="1920240"/>
+            <a:ext cx="3703320" cy="2446020"/>
+          </a:xfrm>
+          <a:prstGeom prst="rect">
+            <a:avLst/>
+          </a:prstGeom>
+          <a:noFill/>
+          <a:ln/>
+        </p:spPr>
+        <p:txBody>
+          <a:bodyPr wrap="square" rtlCol="0" anchor="t"/>
+          <a:lstStyle/>
+          <a:p>
+            <a:pPr indent="0" marL="0">
               <a:lnSpc>
                 <a:spcPct val="120000"/>
               </a:lnSpc>
@@ -1778,13 +1903,13 @@
             <a:r>
               <a:rPr lang="en-US" sz="1000" dirty="0">
                 <a:solidFill>
-                  <a:srgbClr val="8A8A8A"/>
-                </a:solidFill>
-                <a:latin typeface="Microsoft YaHei" pitchFamily="34" charset="0"/>
-                <a:ea typeface="Microsoft YaHei" pitchFamily="34" charset="-122"/>
-                <a:cs typeface="Microsoft YaHei" pitchFamily="34" charset="-120"/>
-              </a:rPr>
-              <a:t>Render 免费层 15 分钟无请求休眠，重启清库——预约数据回 seed、访问计数归零。</a:t>
+                  <a:srgbClr val="9CA3AF"/>
+                </a:solidFill>
+                <a:latin typeface="Microsoft YaHei" pitchFamily="34" charset="0"/>
+                <a:ea typeface="Microsoft YaHei" pitchFamily="34" charset="-122"/>
+                <a:cs typeface="Microsoft YaHei" pitchFamily="34" charset="-120"/>
+              </a:rPr>
+              <a:t>pages.dev国内可直连、Free$0/月、边缘运行无休眠、D1持久化不丢。新增functions/子树+wrangler.toml。</a:t>
             </a:r>
             <a:endParaRPr lang="en-US" sz="1000" dirty="0"/>
           </a:p>
@@ -1792,190 +1917,44 @@
       </p:sp>
       <p:sp>
         <p:nvSpPr>
-          <p:cNvPr id="7" name="Shape 5"/>
-          <p:cNvSpPr/>
-          <p:nvPr/>
-        </p:nvSpPr>
-        <p:spPr>
-          <a:xfrm>
-            <a:off x="4709160" y="1188720"/>
-            <a:ext cx="3977640" cy="3314700"/>
+          <p:cNvPr id="11" name="Text 9"/>
+          <p:cNvSpPr/>
+          <p:nvPr/>
+        </p:nvSpPr>
+        <p:spPr>
+          <a:xfrm>
+            <a:off x="457200" y="4503420"/>
+            <a:ext cx="8229600" cy="365760"/>
           </a:xfrm>
           <a:prstGeom prst="rect">
             <a:avLst/>
           </a:prstGeom>
           <a:solidFill>
-            <a:srgbClr val="1A2128"/>
+            <a:srgbClr val="283142"/>
           </a:solidFill>
           <a:ln w="12700">
             <a:solidFill>
-              <a:srgbClr val="4DD0A7"/>
+              <a:srgbClr val="A3B899"/>
             </a:solidFill>
-            <a:prstDash val="solid"/>
           </a:ln>
         </p:spPr>
-      </p:sp>
-      <p:sp>
-        <p:nvSpPr>
-          <p:cNvPr id="8" name="Text 6"/>
-          <p:cNvSpPr/>
-          <p:nvPr/>
-        </p:nvSpPr>
-        <p:spPr>
-          <a:xfrm>
-            <a:off x="4846320" y="1280160"/>
-            <a:ext cx="3703320" cy="274320"/>
-          </a:xfrm>
-          <a:prstGeom prst="rect">
-            <a:avLst/>
-          </a:prstGeom>
-          <a:noFill/>
-          <a:ln/>
-        </p:spPr>
         <p:txBody>
           <a:bodyPr wrap="square" rtlCol="0" anchor="ctr"/>
           <a:lstStyle/>
           <a:p>
-            <a:pPr algn="l" indent="0" marL="0">
-              <a:buNone/>
-            </a:pPr>
-            <a:r>
-              <a:rPr lang="en-US" sz="1000" b="1" dirty="0">
-                <a:solidFill>
-                  <a:srgbClr val="4DD0A7"/>
-                </a:solidFill>
-                <a:latin typeface="Microsoft YaHei" pitchFamily="34" charset="0"/>
-                <a:ea typeface="Microsoft YaHei" pitchFamily="34" charset="-122"/>
-                <a:cs typeface="Microsoft YaHei" pitchFamily="34" charset="-120"/>
-              </a:rPr>
-              <a:t>解决</a:t>
-            </a:r>
-            <a:endParaRPr lang="en-US" sz="1000" dirty="0"/>
-          </a:p>
-        </p:txBody>
-      </p:sp>
-      <p:sp>
-        <p:nvSpPr>
-          <p:cNvPr id="9" name="Text 7"/>
-          <p:cNvSpPr/>
-          <p:nvPr/>
-        </p:nvSpPr>
-        <p:spPr>
-          <a:xfrm>
-            <a:off x="4846320" y="1554480"/>
-            <a:ext cx="3703320" cy="320040"/>
-          </a:xfrm>
-          <a:prstGeom prst="rect">
-            <a:avLst/>
-          </a:prstGeom>
-          <a:noFill/>
-          <a:ln/>
-        </p:spPr>
-        <p:txBody>
-          <a:bodyPr wrap="square" rtlCol="0" anchor="ctr"/>
-          <a:lstStyle/>
-          <a:p>
-            <a:pPr algn="l" indent="0" marL="0">
-              <a:buNone/>
-            </a:pPr>
-            <a:r>
-              <a:rPr lang="en-US" sz="1300" b="1" dirty="0">
-                <a:solidFill>
-                  <a:srgbClr val="E6E6E6"/>
-                </a:solidFill>
-                <a:latin typeface="Microsoft YaHei" pitchFamily="34" charset="0"/>
-                <a:ea typeface="Microsoft YaHei" pitchFamily="34" charset="-122"/>
-                <a:cs typeface="Microsoft YaHei" pitchFamily="34" charset="-120"/>
-              </a:rPr>
-              <a:t>改用 Cloudflare Pages + Functions + D1</a:t>
-            </a:r>
-            <a:endParaRPr lang="en-US" sz="1300" dirty="0"/>
-          </a:p>
-        </p:txBody>
-      </p:sp>
-      <p:sp>
-        <p:nvSpPr>
-          <p:cNvPr id="10" name="Text 8"/>
-          <p:cNvSpPr/>
-          <p:nvPr/>
-        </p:nvSpPr>
-        <p:spPr>
-          <a:xfrm>
-            <a:off x="4846320" y="1920240"/>
-            <a:ext cx="3703320" cy="2446020"/>
-          </a:xfrm>
-          <a:prstGeom prst="rect">
-            <a:avLst/>
-          </a:prstGeom>
-          <a:noFill/>
-          <a:ln/>
-        </p:spPr>
-        <p:txBody>
-          <a:bodyPr wrap="square" rtlCol="0" anchor="t"/>
-          <a:lstStyle/>
-          <a:p>
-            <a:pPr algn="l" indent="0" marL="0">
-              <a:lnSpc>
-                <a:spcPct val="120000"/>
-              </a:lnSpc>
-              <a:buNone/>
-            </a:pPr>
-            <a:r>
-              <a:rPr lang="en-US" sz="1000" dirty="0">
-                <a:solidFill>
-                  <a:srgbClr val="8A8A8A"/>
-                </a:solidFill>
-                <a:latin typeface="Microsoft YaHei" pitchFamily="34" charset="0"/>
-                <a:ea typeface="Microsoft YaHei" pitchFamily="34" charset="-122"/>
-                <a:cs typeface="Microsoft YaHei" pitchFamily="34" charset="-120"/>
-              </a:rPr>
-              <a:t>pages.dev 国内可直连、Free $0/月、无信用卡、边缘运行无休眠、D1 数据库持久化不丢。新增 functions/ 子树（ESM）+ wrangler.toml D1 binding。</a:t>
-            </a:r>
-            <a:endParaRPr lang="en-US" sz="1000" dirty="0"/>
-          </a:p>
-        </p:txBody>
-      </p:sp>
-      <p:sp>
-        <p:nvSpPr>
-          <p:cNvPr id="11" name="Text 9"/>
-          <p:cNvSpPr/>
-          <p:nvPr/>
-        </p:nvSpPr>
-        <p:spPr>
-          <a:xfrm>
-            <a:off x="457200" y="4503420"/>
-            <a:ext cx="8229600" cy="365760"/>
-          </a:xfrm>
-          <a:prstGeom prst="rect">
-            <a:avLst/>
-          </a:prstGeom>
-          <a:solidFill>
-            <a:srgbClr val="1A2128"/>
-          </a:solidFill>
-          <a:ln w="12700">
-            <a:solidFill>
-              <a:srgbClr val="4DD0A7"/>
-            </a:solidFill>
-            <a:prstDash val="solid"/>
-          </a:ln>
-        </p:spPr>
-        <p:txBody>
-          <a:bodyPr wrap="square" rtlCol="0" anchor="ctr"/>
-          <a:lstStyle/>
-          <a:p>
-            <a:pPr algn="l" indent="0" marL="0">
+            <a:pPr indent="0" marL="0">
               <a:buNone/>
             </a:pPr>
             <a:r>
               <a:rPr lang="en-US" sz="1000" i="1" dirty="0">
                 <a:solidFill>
-                  <a:srgbClr val="E6E6E6"/>
-                </a:solidFill>
-                <a:latin typeface="Microsoft YaHei" pitchFamily="34" charset="0"/>
-                <a:ea typeface="Microsoft YaHei" pitchFamily="34" charset="-122"/>
-                <a:cs typeface="Microsoft YaHei" pitchFamily="34" charset="-120"/>
-              </a:rPr>
-              <a:t>结果：5 个验收 URL 全通过，教师手机可开，数据不丢。</a:t>
+                  <a:srgbClr val="D4D4D8"/>
+                </a:solidFill>
+                <a:latin typeface="Microsoft YaHei" pitchFamily="34" charset="0"/>
+                <a:ea typeface="Microsoft YaHei" pitchFamily="34" charset="-122"/>
+                <a:cs typeface="Microsoft YaHei" pitchFamily="34" charset="-120"/>
+              </a:rPr>
+              <a:t>结果：5个验收URL全通过，教师手机可开，数据不丢。</a:t>
             </a:r>
             <a:endParaRPr lang="en-US" sz="1000" dirty="0"/>
           </a:p>
@@ -1995,7 +1974,7 @@
     <p:bg>
       <p:bgPr>
         <a:solidFill>
-          <a:srgbClr val="0F1419"/>
+          <a:srgbClr val="1E2530"/>
         </a:solidFill>
       </p:bgPr>
     </p:bg>
@@ -2040,7 +2019,7 @@
             <a:r>
               <a:rPr lang="en-US" sz="2400" b="1" dirty="0">
                 <a:solidFill>
-                  <a:srgbClr val="4DD0A7"/>
+                  <a:srgbClr val="A3B899"/>
                 </a:solidFill>
                 <a:latin typeface="Microsoft YaHei" pitchFamily="34" charset="0"/>
                 <a:ea typeface="Microsoft YaHei" pitchFamily="34" charset="-122"/>
@@ -2067,11 +2046,11 @@
             <a:avLst/>
           </a:prstGeom>
           <a:solidFill>
-            <a:srgbClr val="2A1A1A"/>
+            <a:srgbClr val="2D2828"/>
           </a:solidFill>
           <a:ln w="12700">
             <a:solidFill>
-              <a:srgbClr val="FF6B6B"/>
+              <a:srgbClr val="D4A5A5"/>
             </a:solidFill>
             <a:prstDash val="solid"/>
           </a:ln>
@@ -2098,13 +2077,13 @@
           <a:bodyPr wrap="square" rtlCol="0" anchor="ctr"/>
           <a:lstStyle/>
           <a:p>
-            <a:pPr algn="l" indent="0" marL="0">
+            <a:pPr indent="0" marL="0">
               <a:buNone/>
             </a:pPr>
             <a:r>
               <a:rPr lang="en-US" sz="1000" b="1" dirty="0">
                 <a:solidFill>
-                  <a:srgbClr val="FF6B6B"/>
+                  <a:srgbClr val="D4A5A5"/>
                 </a:solidFill>
                 <a:latin typeface="Microsoft YaHei" pitchFamily="34" charset="0"/>
                 <a:ea typeface="Microsoft YaHei" pitchFamily="34" charset="-122"/>
@@ -2137,19 +2116,19 @@
           <a:bodyPr wrap="square" rtlCol="0" anchor="ctr"/>
           <a:lstStyle/>
           <a:p>
-            <a:pPr algn="l" indent="0" marL="0">
+            <a:pPr indent="0" marL="0">
               <a:buNone/>
             </a:pPr>
             <a:r>
               <a:rPr lang="en-US" sz="1300" b="1" dirty="0">
                 <a:solidFill>
-                  <a:srgbClr val="E6E6E6"/>
-                </a:solidFill>
-                <a:latin typeface="Microsoft YaHei" pitchFamily="34" charset="0"/>
-                <a:ea typeface="Microsoft YaHei" pitchFamily="34" charset="-122"/>
-                <a:cs typeface="Microsoft YaHei" pitchFamily="34" charset="-120"/>
-              </a:rPr>
-              <a:t>localStorage 前端判重跨设备失效</a:t>
+                  <a:srgbClr val="D4D4D8"/>
+                </a:solidFill>
+                <a:latin typeface="Microsoft YaHei" pitchFamily="34" charset="0"/>
+                <a:ea typeface="Microsoft YaHei" pitchFamily="34" charset="-122"/>
+                <a:cs typeface="Microsoft YaHei" pitchFamily="34" charset="-120"/>
+              </a:rPr>
+              <a:t>localStorage前端判重跨设备失效</a:t>
             </a:r>
             <a:endParaRPr lang="en-US" sz="1300" dirty="0"/>
           </a:p>
@@ -2176,7 +2155,7 @@
           <a:bodyPr wrap="square" rtlCol="0" anchor="t"/>
           <a:lstStyle/>
           <a:p>
-            <a:pPr algn="l" indent="0" marL="0">
+            <a:pPr indent="0" marL="0">
               <a:lnSpc>
                 <a:spcPct val="120000"/>
               </a:lnSpc>
@@ -2185,13 +2164,13 @@
             <a:r>
               <a:rPr lang="en-US" sz="1000" dirty="0">
                 <a:solidFill>
-                  <a:srgbClr val="8A8A8A"/>
-                </a:solidFill>
-                <a:latin typeface="Microsoft YaHei" pitchFamily="34" charset="0"/>
-                <a:ea typeface="Microsoft YaHei" pitchFamily="34" charset="-122"/>
-                <a:cs typeface="Microsoft YaHei" pitchFamily="34" charset="-120"/>
-              </a:rPr>
-              <a:t>v1 用浏览器 localStorage 存预约 + 前端判重：A 设备约了，B 设备看不到，会撞单；浏览器清缓存后判重数据全丢。</a:t>
+                  <a:srgbClr val="9CA3AF"/>
+                </a:solidFill>
+                <a:latin typeface="Microsoft YaHei" pitchFamily="34" charset="0"/>
+                <a:ea typeface="Microsoft YaHei" pitchFamily="34" charset="-122"/>
+                <a:cs typeface="Microsoft YaHei" pitchFamily="34" charset="-120"/>
+              </a:rPr>
+              <a:t>v1用浏览器localStorage存预约+前端判重：A设备约了，B设备看不到，会撞单；清缓存后判重数据全丢。</a:t>
             </a:r>
             <a:endParaRPr lang="en-US" sz="1000" dirty="0"/>
           </a:p>
@@ -2212,11 +2191,11 @@
             <a:avLst/>
           </a:prstGeom>
           <a:solidFill>
-            <a:srgbClr val="1A2128"/>
+            <a:srgbClr val="283142"/>
           </a:solidFill>
           <a:ln w="12700">
             <a:solidFill>
-              <a:srgbClr val="4DD0A7"/>
+              <a:srgbClr val="A3B899"/>
             </a:solidFill>
             <a:prstDash val="solid"/>
           </a:ln>
@@ -2243,13 +2222,13 @@
           <a:bodyPr wrap="square" rtlCol="0" anchor="ctr"/>
           <a:lstStyle/>
           <a:p>
-            <a:pPr algn="l" indent="0" marL="0">
+            <a:pPr indent="0" marL="0">
               <a:buNone/>
             </a:pPr>
             <a:r>
               <a:rPr lang="en-US" sz="1000" b="1" dirty="0">
                 <a:solidFill>
-                  <a:srgbClr val="4DD0A7"/>
+                  <a:srgbClr val="A3B899"/>
                 </a:solidFill>
                 <a:latin typeface="Microsoft YaHei" pitchFamily="34" charset="0"/>
                 <a:ea typeface="Microsoft YaHei" pitchFamily="34" charset="-122"/>
@@ -2282,19 +2261,19 @@
           <a:bodyPr wrap="square" rtlCol="0" anchor="ctr"/>
           <a:lstStyle/>
           <a:p>
-            <a:pPr algn="l" indent="0" marL="0">
+            <a:pPr indent="0" marL="0">
               <a:buNone/>
             </a:pPr>
             <a:r>
               <a:rPr lang="en-US" sz="1300" b="1" dirty="0">
                 <a:solidFill>
-                  <a:srgbClr val="E6E6E6"/>
-                </a:solidFill>
-                <a:latin typeface="Microsoft YaHei" pitchFamily="34" charset="0"/>
-                <a:ea typeface="Microsoft YaHei" pitchFamily="34" charset="-122"/>
-                <a:cs typeface="Microsoft YaHei" pitchFamily="34" charset="-120"/>
-              </a:rPr>
-              <a:t>服务端数据库唯一索引 + 409</a:t>
+                  <a:srgbClr val="D4D4D8"/>
+                </a:solidFill>
+                <a:latin typeface="Microsoft YaHei" pitchFamily="34" charset="0"/>
+                <a:ea typeface="Microsoft YaHei" pitchFamily="34" charset="-122"/>
+                <a:cs typeface="Microsoft YaHei" pitchFamily="34" charset="-120"/>
+              </a:rPr>
+              <a:t>服务端数据库唯一索引+409</a:t>
             </a:r>
             <a:endParaRPr lang="en-US" sz="1300" dirty="0"/>
           </a:p>
@@ -2321,7 +2300,7 @@
           <a:bodyPr wrap="square" rtlCol="0" anchor="t"/>
           <a:lstStyle/>
           <a:p>
-            <a:pPr algn="l" indent="0" marL="0">
+            <a:pPr indent="0" marL="0">
               <a:lnSpc>
                 <a:spcPct val="120000"/>
               </a:lnSpc>
@@ -2330,13 +2309,13 @@
             <a:r>
               <a:rPr lang="en-US" sz="1000" dirty="0">
                 <a:solidFill>
-                  <a:srgbClr val="8A8A8A"/>
-                </a:solidFill>
-                <a:latin typeface="Microsoft YaHei" pitchFamily="34" charset="0"/>
-                <a:ea typeface="Microsoft YaHei" pitchFamily="34" charset="-122"/>
-                <a:cs typeface="Microsoft YaHei" pitchFamily="34" charset="-120"/>
-              </a:rPr>
-              <a:t>schema.sql 建 UNIQUE(equip_id, date, slot) 唯一索引；POST /api/bookings 插入冲突返回 409；前端不再本地判重，以服务端 409 为唯一事实源。</a:t>
+                  <a:srgbClr val="9CA3AF"/>
+                </a:solidFill>
+                <a:latin typeface="Microsoft YaHei" pitchFamily="34" charset="0"/>
+                <a:ea typeface="Microsoft YaHei" pitchFamily="34" charset="-122"/>
+                <a:cs typeface="Microsoft YaHei" pitchFamily="34" charset="-120"/>
+              </a:rPr>
+              <a:t>schema.sql建UNIQUE(equip_id,date,slot)；POST冲突返回409；前端不再本地判重，以服务端409为唯一事实源。</a:t>
             </a:r>
             <a:endParaRPr lang="en-US" sz="1000" dirty="0"/>
           </a:p>
@@ -2357,32 +2336,31 @@
             <a:avLst/>
           </a:prstGeom>
           <a:solidFill>
-            <a:srgbClr val="1A2128"/>
+            <a:srgbClr val="283142"/>
           </a:solidFill>
           <a:ln w="12700">
             <a:solidFill>
-              <a:srgbClr val="4DD0A7"/>
+              <a:srgbClr val="A3B899"/>
             </a:solidFill>
-            <a:prstDash val="solid"/>
           </a:ln>
         </p:spPr>
         <p:txBody>
           <a:bodyPr wrap="square" rtlCol="0" anchor="ctr"/>
           <a:lstStyle/>
           <a:p>
-            <a:pPr algn="l" indent="0" marL="0">
+            <a:pPr indent="0" marL="0">
               <a:buNone/>
             </a:pPr>
             <a:r>
               <a:rPr lang="en-US" sz="1000" i="1" dirty="0">
                 <a:solidFill>
-                  <a:srgbClr val="E6E6E6"/>
-                </a:solidFill>
-                <a:latin typeface="Microsoft YaHei" pitchFamily="34" charset="0"/>
-                <a:ea typeface="Microsoft YaHei" pitchFamily="34" charset="-122"/>
-                <a:cs typeface="Microsoft YaHei" pitchFamily="34" charset="-120"/>
-              </a:rPr>
-              <a:t>结果：跨设备撞单由数据库兜底，前端 v1 localStorage 判重逻辑已废弃。</a:t>
+                  <a:srgbClr val="D4D4D8"/>
+                </a:solidFill>
+                <a:latin typeface="Microsoft YaHei" pitchFamily="34" charset="0"/>
+                <a:ea typeface="Microsoft YaHei" pitchFamily="34" charset="-122"/>
+                <a:cs typeface="Microsoft YaHei" pitchFamily="34" charset="-120"/>
+              </a:rPr>
+              <a:t>结果：跨设备撞单由数据库兜底，前端v1 localStorage判重逻辑已废弃。</a:t>
             </a:r>
             <a:endParaRPr lang="en-US" sz="1000" dirty="0"/>
           </a:p>
@@ -2402,7 +2380,7 @@
     <p:bg>
       <p:bgPr>
         <a:solidFill>
-          <a:srgbClr val="0F1419"/>
+          <a:srgbClr val="1E2530"/>
         </a:solidFill>
       </p:bgPr>
     </p:bg>
@@ -2447,13 +2425,13 @@
             <a:r>
               <a:rPr lang="en-US" sz="2400" b="1" dirty="0">
                 <a:solidFill>
-                  <a:srgbClr val="4DD0A7"/>
-                </a:solidFill>
-                <a:latin typeface="Microsoft YaHei" pitchFamily="34" charset="0"/>
-                <a:ea typeface="Microsoft YaHei" pitchFamily="34" charset="-122"/>
-                <a:cs typeface="Microsoft YaHei" pitchFamily="34" charset="-120"/>
-              </a:rPr>
-              <a:t>03  CI 踩坑（Gitee Go）</a:t>
+                  <a:srgbClr val="A3B899"/>
+                </a:solidFill>
+                <a:latin typeface="Microsoft YaHei" pitchFamily="34" charset="0"/>
+                <a:ea typeface="Microsoft YaHei" pitchFamily="34" charset="-122"/>
+                <a:cs typeface="Microsoft YaHei" pitchFamily="34" charset="-120"/>
+              </a:rPr>
+              <a:t>03  CI踩坑（Gitee Go）</a:t>
             </a:r>
             <a:endParaRPr lang="en-US" sz="2400" dirty="0"/>
           </a:p>
@@ -2474,11 +2452,11 @@
             <a:avLst/>
           </a:prstGeom>
           <a:solidFill>
-            <a:srgbClr val="2A1A1A"/>
+            <a:srgbClr val="2D2828"/>
           </a:solidFill>
           <a:ln w="12700">
             <a:solidFill>
-              <a:srgbClr val="FF6B6B"/>
+              <a:srgbClr val="D4A5A5"/>
             </a:solidFill>
             <a:prstDash val="solid"/>
           </a:ln>
@@ -2505,13 +2483,13 @@
           <a:bodyPr wrap="square" rtlCol="0" anchor="ctr"/>
           <a:lstStyle/>
           <a:p>
-            <a:pPr algn="l" indent="0" marL="0">
+            <a:pPr indent="0" marL="0">
               <a:buNone/>
             </a:pPr>
             <a:r>
               <a:rPr lang="en-US" sz="1000" b="1" dirty="0">
                 <a:solidFill>
-                  <a:srgbClr val="FF6B6B"/>
+                  <a:srgbClr val="D4A5A5"/>
                 </a:solidFill>
                 <a:latin typeface="Microsoft YaHei" pitchFamily="34" charset="0"/>
                 <a:ea typeface="Microsoft YaHei" pitchFamily="34" charset="-122"/>
@@ -2544,19 +2522,19 @@
           <a:bodyPr wrap="square" rtlCol="0" anchor="ctr"/>
           <a:lstStyle/>
           <a:p>
-            <a:pPr algn="l" indent="0" marL="0">
+            <a:pPr indent="0" marL="0">
               <a:buNone/>
             </a:pPr>
             <a:r>
               <a:rPr lang="en-US" sz="1300" b="1" dirty="0">
                 <a:solidFill>
-                  <a:srgbClr val="E6E6E6"/>
-                </a:solidFill>
-                <a:latin typeface="Microsoft YaHei" pitchFamily="34" charset="0"/>
-                <a:ea typeface="Microsoft YaHei" pitchFamily="34" charset="-122"/>
-                <a:cs typeface="Microsoft YaHei" pitchFamily="34" charset="-120"/>
-              </a:rPr>
-              <a:t>YAML schema 与直觉不同 + 通知不可达</a:t>
+                  <a:srgbClr val="D4D4D8"/>
+                </a:solidFill>
+                <a:latin typeface="Microsoft YaHei" pitchFamily="34" charset="0"/>
+                <a:ea typeface="Microsoft YaHei" pitchFamily="34" charset="-122"/>
+                <a:cs typeface="Microsoft YaHei" pitchFamily="34" charset="-120"/>
+              </a:rPr>
+              <a:t>YAML schema与直觉不同+通知不可达</a:t>
             </a:r>
             <a:endParaRPr lang="en-US" sz="1300" dirty="0"/>
           </a:p>
@@ -2583,7 +2561,7 @@
           <a:bodyPr wrap="square" rtlCol="0" anchor="t"/>
           <a:lstStyle/>
           <a:p>
-            <a:pPr algn="l" indent="0" marL="0">
+            <a:pPr indent="0" marL="0">
               <a:lnSpc>
                 <a:spcPct val="120000"/>
               </a:lnSpc>
@@ -2592,18 +2570,18 @@
             <a:r>
               <a:rPr lang="en-US" sz="1000" dirty="0">
                 <a:solidFill>
-                  <a:srgbClr val="8A8A8A"/>
-                </a:solidFill>
-                <a:latin typeface="Microsoft YaHei" pitchFamily="34" charset="0"/>
-                <a:ea typeface="Microsoft YaHei" pitchFamily="34" charset="-122"/>
-                <a:cs typeface="Microsoft YaHei" pitchFamily="34" charset="-120"/>
-              </a:rPr>
-              <a:t>• commands 多行块报 "steps 配置缺失"</a:t>
+                  <a:srgbClr val="9CA3AF"/>
+                </a:solidFill>
+                <a:latin typeface="Microsoft YaHei" pitchFamily="34" charset="0"/>
+                <a:ea typeface="Microsoft YaHei" pitchFamily="34" charset="-122"/>
+                <a:cs typeface="Microsoft YaHei" pitchFamily="34" charset="-120"/>
+              </a:rPr>
+              <a:t>•commands多行块报错</a:t>
             </a:r>
             <a:endParaRPr lang="en-US" sz="1000" dirty="0"/>
           </a:p>
           <a:p>
-            <a:pPr algn="l" indent="0" marL="0">
+            <a:pPr indent="0" marL="0">
               <a:lnSpc>
                 <a:spcPct val="120000"/>
               </a:lnSpc>
@@ -2612,18 +2590,18 @@
             <a:r>
               <a:rPr lang="en-US" sz="1000" dirty="0">
                 <a:solidFill>
-                  <a:srgbClr val="8A8A8A"/>
-                </a:solidFill>
-                <a:latin typeface="Microsoft YaHei" pitchFamily="34" charset="0"/>
-                <a:ea typeface="Microsoft YaHei" pitchFamily="34" charset="-122"/>
-                <a:cs typeface="Microsoft YaHei" pitchFamily="34" charset="-120"/>
-              </a:rPr>
-              <a:t>• 按分支发现 YAML，主线 main 但默认分支 master</a:t>
+                  <a:srgbClr val="9CA3AF"/>
+                </a:solidFill>
+                <a:latin typeface="Microsoft YaHei" pitchFamily="34" charset="0"/>
+                <a:ea typeface="Microsoft YaHei" pitchFamily="34" charset="-122"/>
+                <a:cs typeface="Microsoft YaHei" pitchFamily="34" charset="-120"/>
+              </a:rPr>
+              <a:t>•按分支发现YAML，主线main但默认master</a:t>
             </a:r>
             <a:endParaRPr lang="en-US" sz="1000" dirty="0"/>
           </a:p>
           <a:p>
-            <a:pPr algn="l" indent="0" marL="0">
+            <a:pPr indent="0" marL="0">
               <a:lnSpc>
                 <a:spcPct val="120000"/>
               </a:lnSpc>
@@ -2632,18 +2610,18 @@
             <a:r>
               <a:rPr lang="en-US" sz="1000" dirty="0">
                 <a:solidFill>
-                  <a:srgbClr val="8A8A8A"/>
-                </a:solidFill>
-                <a:latin typeface="Microsoft YaHei" pitchFamily="34" charset="0"/>
-                <a:ea typeface="Microsoft YaHei" pitchFamily="34" charset="-122"/>
-                <a:cs typeface="Microsoft YaHei" pitchFamily="34" charset="-120"/>
-              </a:rPr>
-              <a:t>• 社区版站内信/邮件均收不到（成功失败皆然）</a:t>
+                  <a:srgbClr val="9CA3AF"/>
+                </a:solidFill>
+                <a:latin typeface="Microsoft YaHei" pitchFamily="34" charset="0"/>
+                <a:ea typeface="Microsoft YaHei" pitchFamily="34" charset="-122"/>
+                <a:cs typeface="Microsoft YaHei" pitchFamily="34" charset="-120"/>
+              </a:rPr>
+              <a:t>•社区版站内信/邮件均收不到</a:t>
             </a:r>
             <a:endParaRPr lang="en-US" sz="1000" dirty="0"/>
           </a:p>
           <a:p>
-            <a:pPr algn="l" indent="0" marL="0">
+            <a:pPr indent="0" marL="0">
               <a:lnSpc>
                 <a:spcPct val="120000"/>
               </a:lnSpc>
@@ -2652,13 +2630,13 @@
             <a:r>
               <a:rPr lang="en-US" sz="1000" dirty="0">
                 <a:solidFill>
-                  <a:srgbClr val="8A8A8A"/>
-                </a:solidFill>
-                <a:latin typeface="Microsoft YaHei" pitchFamily="34" charset="0"/>
-                <a:ea typeface="Microsoft YaHei" pitchFamily="34" charset="-122"/>
-                <a:cs typeface="Microsoft YaHei" pitchFamily="34" charset="-120"/>
-              </a:rPr>
-              <a:t>• build@nodejs 插件最高 15.x，跑不了 node:sqlite</a:t>
+                  <a:srgbClr val="9CA3AF"/>
+                </a:solidFill>
+                <a:latin typeface="Microsoft YaHei" pitchFamily="34" charset="0"/>
+                <a:ea typeface="Microsoft YaHei" pitchFamily="34" charset="-122"/>
+                <a:cs typeface="Microsoft YaHei" pitchFamily="34" charset="-120"/>
+              </a:rPr>
+              <a:t>•build@nodejs插件最高15.x，跑不了node:sqlite</a:t>
             </a:r>
             <a:endParaRPr lang="en-US" sz="1000" dirty="0"/>
           </a:p>
@@ -2679,11 +2657,11 @@
             <a:avLst/>
           </a:prstGeom>
           <a:solidFill>
-            <a:srgbClr val="1A2128"/>
+            <a:srgbClr val="283142"/>
           </a:solidFill>
           <a:ln w="12700">
             <a:solidFill>
-              <a:srgbClr val="4DD0A7"/>
+              <a:srgbClr val="A3B899"/>
             </a:solidFill>
             <a:prstDash val="solid"/>
           </a:ln>
@@ -2710,13 +2688,13 @@
           <a:bodyPr wrap="square" rtlCol="0" anchor="ctr"/>
           <a:lstStyle/>
           <a:p>
-            <a:pPr algn="l" indent="0" marL="0">
+            <a:pPr indent="0" marL="0">
               <a:buNone/>
             </a:pPr>
             <a:r>
               <a:rPr lang="en-US" sz="1000" b="1" dirty="0">
                 <a:solidFill>
-                  <a:srgbClr val="4DD0A7"/>
+                  <a:srgbClr val="A3B899"/>
                 </a:solidFill>
                 <a:latin typeface="Microsoft YaHei" pitchFamily="34" charset="0"/>
                 <a:ea typeface="Microsoft YaHei" pitchFamily="34" charset="-122"/>
@@ -2749,19 +2727,19 @@
           <a:bodyPr wrap="square" rtlCol="0" anchor="ctr"/>
           <a:lstStyle/>
           <a:p>
-            <a:pPr algn="l" indent="0" marL="0">
+            <a:pPr indent="0" marL="0">
               <a:buNone/>
             </a:pPr>
             <a:r>
               <a:rPr lang="en-US" sz="1300" b="1" dirty="0">
                 <a:solidFill>
-                  <a:srgbClr val="E6E6E6"/>
-                </a:solidFill>
-                <a:latin typeface="Microsoft YaHei" pitchFamily="34" charset="0"/>
-                <a:ea typeface="Microsoft YaHei" pitchFamily="34" charset="-122"/>
-                <a:cs typeface="Microsoft YaHei" pitchFamily="34" charset="-120"/>
-              </a:rPr>
-              <a:t>按 schema 重写 + 双分支同步</a:t>
+                  <a:srgbClr val="D4D4D8"/>
+                </a:solidFill>
+                <a:latin typeface="Microsoft YaHei" pitchFamily="34" charset="0"/>
+                <a:ea typeface="Microsoft YaHei" pitchFamily="34" charset="-122"/>
+                <a:cs typeface="Microsoft YaHei" pitchFamily="34" charset="-120"/>
+              </a:rPr>
+              <a:t>按schema重写+双分支同步</a:t>
             </a:r>
             <a:endParaRPr lang="en-US" sz="1300" dirty="0"/>
           </a:p>
@@ -2788,7 +2766,7 @@
           <a:bodyPr wrap="square" rtlCol="0" anchor="t"/>
           <a:lstStyle/>
           <a:p>
-            <a:pPr algn="l" indent="0" marL="0">
+            <a:pPr indent="0" marL="0">
               <a:lnSpc>
                 <a:spcPct val="120000"/>
               </a:lnSpc>
@@ -2797,18 +2775,18 @@
             <a:r>
               <a:rPr lang="en-US" sz="1000" dirty="0">
                 <a:solidFill>
-                  <a:srgbClr val="8A8A8A"/>
-                </a:solidFill>
-                <a:latin typeface="Microsoft YaHei" pitchFamily="34" charset="0"/>
-                <a:ea typeface="Microsoft YaHei" pitchFamily="34" charset="-122"/>
-                <a:cs typeface="Microsoft YaHei" pitchFamily="34" charset="-120"/>
-              </a:rPr>
-              <a:t>• commands 改字符串列表（链式单行）</a:t>
+                  <a:srgbClr val="9CA3AF"/>
+                </a:solidFill>
+                <a:latin typeface="Microsoft YaHei" pitchFamily="34" charset="0"/>
+                <a:ea typeface="Microsoft YaHei" pitchFamily="34" charset="-122"/>
+                <a:cs typeface="Microsoft YaHei" pitchFamily="34" charset="-120"/>
+              </a:rPr>
+              <a:t>•commands改字符串列表</a:t>
             </a:r>
             <a:endParaRPr lang="en-US" sz="1000" dirty="0"/>
           </a:p>
           <a:p>
-            <a:pPr algn="l" indent="0" marL="0">
+            <a:pPr indent="0" marL="0">
               <a:lnSpc>
                 <a:spcPct val="120000"/>
               </a:lnSpc>
@@ -2817,18 +2795,18 @@
             <a:r>
               <a:rPr lang="en-US" sz="1000" dirty="0">
                 <a:solidFill>
-                  <a:srgbClr val="8A8A8A"/>
-                </a:solidFill>
-                <a:latin typeface="Microsoft YaHei" pitchFamily="34" charset="0"/>
-                <a:ea typeface="Microsoft YaHei" pitchFamily="34" charset="-122"/>
-                <a:cs typeface="Microsoft YaHei" pitchFamily="34" charset="-120"/>
-              </a:rPr>
-              <a:t>• git push origin main:master 同步</a:t>
+                  <a:srgbClr val="9CA3AF"/>
+                </a:solidFill>
+                <a:latin typeface="Microsoft YaHei" pitchFamily="34" charset="0"/>
+                <a:ea typeface="Microsoft YaHei" pitchFamily="34" charset="-122"/>
+                <a:cs typeface="Microsoft YaHei" pitchFamily="34" charset="-120"/>
+              </a:rPr>
+              <a:t>•git push origin main:master同步</a:t>
             </a:r>
             <a:endParaRPr lang="en-US" sz="1000" dirty="0"/>
           </a:p>
           <a:p>
-            <a:pPr algn="l" indent="0" marL="0">
+            <a:pPr indent="0" marL="0">
               <a:lnSpc>
                 <a:spcPct val="120000"/>
               </a:lnSpc>
@@ -2837,18 +2815,18 @@
             <a:r>
               <a:rPr lang="en-US" sz="1000" dirty="0">
                 <a:solidFill>
-                  <a:srgbClr val="8A8A8A"/>
-                </a:solidFill>
-                <a:latin typeface="Microsoft YaHei" pitchFamily="34" charset="0"/>
-                <a:ea typeface="Microsoft YaHei" pitchFamily="34" charset="-122"/>
-                <a:cs typeface="Microsoft YaHei" pitchFamily="34" charset="-120"/>
-              </a:rPr>
-              <a:t>• 以构建历史页状态为准（README 踩坑 4 记录）</a:t>
+                  <a:srgbClr val="9CA3AF"/>
+                </a:solidFill>
+                <a:latin typeface="Microsoft YaHei" pitchFamily="34" charset="0"/>
+                <a:ea typeface="Microsoft YaHei" pitchFamily="34" charset="-122"/>
+                <a:cs typeface="Microsoft YaHei" pitchFamily="34" charset="-120"/>
+              </a:rPr>
+              <a:t>•以构建历史页状态为准</a:t>
             </a:r>
             <a:endParaRPr lang="en-US" sz="1000" dirty="0"/>
           </a:p>
           <a:p>
-            <a:pPr algn="l" indent="0" marL="0">
+            <a:pPr indent="0" marL="0">
               <a:lnSpc>
                 <a:spcPct val="120000"/>
               </a:lnSpc>
@@ -2857,13 +2835,13 @@
             <a:r>
               <a:rPr lang="en-US" sz="1000" dirty="0">
                 <a:solidFill>
-                  <a:srgbClr val="8A8A8A"/>
-                </a:solidFill>
-                <a:latin typeface="Microsoft YaHei" pitchFamily="34" charset="0"/>
-                <a:ea typeface="Microsoft YaHei" pitchFamily="34" charset="-122"/>
-                <a:cs typeface="Microsoft YaHei" pitchFamily="34" charset="-120"/>
-              </a:rPr>
-              <a:t>• npmmirror 源自装 Node 22 后 npm test</a:t>
+                  <a:srgbClr val="9CA3AF"/>
+                </a:solidFill>
+                <a:latin typeface="Microsoft YaHei" pitchFamily="34" charset="0"/>
+                <a:ea typeface="Microsoft YaHei" pitchFamily="34" charset="-122"/>
+                <a:cs typeface="Microsoft YaHei" pitchFamily="34" charset="-120"/>
+              </a:rPr>
+              <a:t>•npmmirror源自装Node22后npm test</a:t>
             </a:r>
             <a:endParaRPr lang="en-US" sz="1000" dirty="0"/>
           </a:p>
@@ -2884,32 +2862,31 @@
             <a:avLst/>
           </a:prstGeom>
           <a:solidFill>
-            <a:srgbClr val="1A2128"/>
+            <a:srgbClr val="283142"/>
           </a:solidFill>
           <a:ln w="12700">
             <a:solidFill>
-              <a:srgbClr val="4DD0A7"/>
+              <a:srgbClr val="A3B899"/>
             </a:solidFill>
-            <a:prstDash val="solid"/>
           </a:ln>
         </p:spPr>
         <p:txBody>
           <a:bodyPr wrap="square" rtlCol="0" anchor="ctr"/>
           <a:lstStyle/>
           <a:p>
-            <a:pPr algn="l" indent="0" marL="0">
+            <a:pPr indent="0" marL="0">
               <a:buNone/>
             </a:pPr>
             <a:r>
               <a:rPr lang="en-US" sz="1000" i="1" dirty="0">
                 <a:solidFill>
-                  <a:srgbClr val="E6E6E6"/>
-                </a:solidFill>
-                <a:latin typeface="Microsoft YaHei" pitchFamily="34" charset="0"/>
-                <a:ea typeface="Microsoft YaHei" pitchFamily="34" charset="-122"/>
-                <a:cs typeface="Microsoft YaHei" pitchFamily="34" charset="-120"/>
-              </a:rPr>
-              <a:t>结果：push → 装依赖 → 跑测试全绿；故意失败验证 CI 拦截有效。</a:t>
+                  <a:srgbClr val="D4D4D8"/>
+                </a:solidFill>
+                <a:latin typeface="Microsoft YaHei" pitchFamily="34" charset="0"/>
+                <a:ea typeface="Microsoft YaHei" pitchFamily="34" charset="-122"/>
+                <a:cs typeface="Microsoft YaHei" pitchFamily="34" charset="-120"/>
+              </a:rPr>
+              <a:t>结果：push→装依赖→跑测试全绿；故意失败验证CI拦截有效。</a:t>
             </a:r>
             <a:endParaRPr lang="en-US" sz="1000" dirty="0"/>
           </a:p>
@@ -2929,7 +2906,7 @@
     <p:bg>
       <p:bgPr>
         <a:solidFill>
-          <a:srgbClr val="0F1419"/>
+          <a:srgbClr val="1E2530"/>
         </a:solidFill>
       </p:bgPr>
     </p:bg>
@@ -2974,7 +2951,7 @@
             <a:r>
               <a:rPr lang="en-US" sz="2400" b="1" dirty="0">
                 <a:solidFill>
-                  <a:srgbClr val="4DD0A7"/>
+                  <a:srgbClr val="A3B899"/>
                 </a:solidFill>
                 <a:latin typeface="Microsoft YaHei" pitchFamily="34" charset="0"/>
                 <a:ea typeface="Microsoft YaHei" pitchFamily="34" charset="-122"/>
@@ -3001,11 +2978,11 @@
             <a:avLst/>
           </a:prstGeom>
           <a:solidFill>
-            <a:srgbClr val="2A1A1A"/>
+            <a:srgbClr val="2D2828"/>
           </a:solidFill>
           <a:ln w="12700">
             <a:solidFill>
-              <a:srgbClr val="FF6B6B"/>
+              <a:srgbClr val="D4A5A5"/>
             </a:solidFill>
             <a:prstDash val="solid"/>
           </a:ln>
@@ -3032,13 +3009,13 @@
           <a:bodyPr wrap="square" rtlCol="0" anchor="ctr"/>
           <a:lstStyle/>
           <a:p>
-            <a:pPr algn="l" indent="0" marL="0">
+            <a:pPr indent="0" marL="0">
               <a:buNone/>
             </a:pPr>
             <a:r>
               <a:rPr lang="en-US" sz="1000" b="1" dirty="0">
                 <a:solidFill>
-                  <a:srgbClr val="FF6B6B"/>
+                  <a:srgbClr val="D4A5A5"/>
                 </a:solidFill>
                 <a:latin typeface="Microsoft YaHei" pitchFamily="34" charset="0"/>
                 <a:ea typeface="Microsoft YaHei" pitchFamily="34" charset="-122"/>
@@ -3071,19 +3048,19 @@
           <a:bodyPr wrap="square" rtlCol="0" anchor="ctr"/>
           <a:lstStyle/>
           <a:p>
-            <a:pPr algn="l" indent="0" marL="0">
+            <a:pPr indent="0" marL="0">
               <a:buNone/>
             </a:pPr>
             <a:r>
               <a:rPr lang="en-US" sz="1300" b="1" dirty="0">
                 <a:solidFill>
-                  <a:srgbClr val="E6E6E6"/>
-                </a:solidFill>
-                <a:latin typeface="Microsoft YaHei" pitchFamily="34" charset="0"/>
-                <a:ea typeface="Microsoft YaHei" pitchFamily="34" charset="-122"/>
-                <a:cs typeface="Microsoft YaHei" pitchFamily="34" charset="-120"/>
-              </a:rPr>
-              <a:t>Functions 命名限制 + 402 状态码不一致</a:t>
+                  <a:srgbClr val="D4D4D8"/>
+                </a:solidFill>
+                <a:latin typeface="Microsoft YaHei" pitchFamily="34" charset="0"/>
+                <a:ea typeface="Microsoft YaHei" pitchFamily="34" charset="-122"/>
+                <a:cs typeface="Microsoft YaHei" pitchFamily="34" charset="-120"/>
+              </a:rPr>
+              <a:t>Functions命名限制+402状态码不一致</a:t>
             </a:r>
             <a:endParaRPr lang="en-US" sz="1300" dirty="0"/>
           </a:p>
@@ -3110,7 +3087,7 @@
           <a:bodyPr wrap="square" rtlCol="0" anchor="t"/>
           <a:lstStyle/>
           <a:p>
-            <a:pPr algn="l" indent="0" marL="0">
+            <a:pPr indent="0" marL="0">
               <a:lnSpc>
                 <a:spcPct val="120000"/>
               </a:lnSpc>
@@ -3119,18 +3096,18 @@
             <a:r>
               <a:rPr lang="en-US" sz="1000" dirty="0">
                 <a:solidFill>
-                  <a:srgbClr val="8A8A8A"/>
-                </a:solidFill>
-                <a:latin typeface="Microsoft YaHei" pitchFamily="34" charset="0"/>
-                <a:ea typeface="Microsoft YaHei" pitchFamily="34" charset="-122"/>
-                <a:cs typeface="Microsoft YaHei" pitchFamily="34" charset="-120"/>
-              </a:rPr>
-              <a:t>• Cloudflare Pages Functions 的 DELETE 处理器用 onDelete 命名 → 405</a:t>
+                  <a:srgbClr val="9CA3AF"/>
+                </a:solidFill>
+                <a:latin typeface="Microsoft YaHei" pitchFamily="34" charset="0"/>
+                <a:ea typeface="Microsoft YaHei" pitchFamily="34" charset="-122"/>
+                <a:cs typeface="Microsoft YaHei" pitchFamily="34" charset="-120"/>
+              </a:rPr>
+              <a:t>•DELETE处理器用onDelete命名→405</a:t>
             </a:r>
             <a:endParaRPr lang="en-US" sz="1000" dirty="0"/>
           </a:p>
           <a:p>
-            <a:pPr algn="l" indent="0" marL="0">
+            <a:pPr indent="0" marL="0">
               <a:lnSpc>
                 <a:spcPct val="120000"/>
               </a:lnSpc>
@@ -3139,13 +3116,13 @@
             <a:r>
               <a:rPr lang="en-US" sz="1000" dirty="0">
                 <a:solidFill>
-                  <a:srgbClr val="8A8A8A"/>
-                </a:solidFill>
-                <a:latin typeface="Microsoft YaHei" pitchFamily="34" charset="0"/>
-                <a:ea typeface="Microsoft YaHei" pitchFamily="34" charset="-122"/>
-                <a:cs typeface="Microsoft YaHei" pitchFamily="34" charset="-120"/>
-              </a:rPr>
-              <a:t>• DeepSeek 402（余额不足）：本地后端映射 QUOTA→429；线上 Functions 直接返回 503</a:t>
+                  <a:srgbClr val="9CA3AF"/>
+                </a:solidFill>
+                <a:latin typeface="Microsoft YaHei" pitchFamily="34" charset="0"/>
+                <a:ea typeface="Microsoft YaHei" pitchFamily="34" charset="-122"/>
+                <a:cs typeface="Microsoft YaHei" pitchFamily="34" charset="-120"/>
+              </a:rPr>
+              <a:t>•DeepSeek 402：本地映射QUOTA→429；线上Functions返回503</a:t>
             </a:r>
             <a:endParaRPr lang="en-US" sz="1000" dirty="0"/>
           </a:p>
@@ -3166,11 +3143,11 @@
             <a:avLst/>
           </a:prstGeom>
           <a:solidFill>
-            <a:srgbClr val="1A2128"/>
+            <a:srgbClr val="283142"/>
           </a:solidFill>
           <a:ln w="12700">
             <a:solidFill>
-              <a:srgbClr val="4DD0A7"/>
+              <a:srgbClr val="A3B899"/>
             </a:solidFill>
             <a:prstDash val="solid"/>
           </a:ln>
@@ -3197,13 +3174,13 @@
           <a:bodyPr wrap="square" rtlCol="0" anchor="ctr"/>
           <a:lstStyle/>
           <a:p>
-            <a:pPr algn="l" indent="0" marL="0">
+            <a:pPr indent="0" marL="0">
               <a:buNone/>
             </a:pPr>
             <a:r>
               <a:rPr lang="en-US" sz="1000" b="1" dirty="0">
                 <a:solidFill>
-                  <a:srgbClr val="4DD0A7"/>
+                  <a:srgbClr val="A3B899"/>
                 </a:solidFill>
                 <a:latin typeface="Microsoft YaHei" pitchFamily="34" charset="0"/>
                 <a:ea typeface="Microsoft YaHei" pitchFamily="34" charset="-122"/>
@@ -3236,19 +3213,19 @@
           <a:bodyPr wrap="square" rtlCol="0" anchor="ctr"/>
           <a:lstStyle/>
           <a:p>
-            <a:pPr algn="l" indent="0" marL="0">
+            <a:pPr indent="0" marL="0">
               <a:buNone/>
             </a:pPr>
             <a:r>
               <a:rPr lang="en-US" sz="1300" b="1" dirty="0">
                 <a:solidFill>
-                  <a:srgbClr val="E6E6E6"/>
-                </a:solidFill>
-                <a:latin typeface="Microsoft YaHei" pitchFamily="34" charset="0"/>
-                <a:ea typeface="Microsoft YaHei" pitchFamily="34" charset="-122"/>
-                <a:cs typeface="Microsoft YaHei" pitchFamily="34" charset="-120"/>
-              </a:rPr>
-              <a:t>对齐命名 + 统一状态码映射</a:t>
+                  <a:srgbClr val="D4D4D8"/>
+                </a:solidFill>
+                <a:latin typeface="Microsoft YaHei" pitchFamily="34" charset="0"/>
+                <a:ea typeface="Microsoft YaHei" pitchFamily="34" charset="-122"/>
+                <a:cs typeface="Microsoft YaHei" pitchFamily="34" charset="-120"/>
+              </a:rPr>
+              <a:t>对齐命名+统一状态码映射</a:t>
             </a:r>
             <a:endParaRPr lang="en-US" sz="1300" dirty="0"/>
           </a:p>
@@ -3275,7 +3252,7 @@
           <a:bodyPr wrap="square" rtlCol="0" anchor="t"/>
           <a:lstStyle/>
           <a:p>
-            <a:pPr algn="l" indent="0" marL="0">
+            <a:pPr indent="0" marL="0">
               <a:lnSpc>
                 <a:spcPct val="120000"/>
               </a:lnSpc>
@@ -3284,18 +3261,18 @@
             <a:r>
               <a:rPr lang="en-US" sz="1000" dirty="0">
                 <a:solidFill>
-                  <a:srgbClr val="8A8A8A"/>
-                </a:solidFill>
-                <a:latin typeface="Microsoft YaHei" pitchFamily="34" charset="0"/>
-                <a:ea typeface="Microsoft YaHei" pitchFamily="34" charset="-122"/>
-                <a:cs typeface="Microsoft YaHei" pitchFamily="34" charset="-120"/>
-              </a:rPr>
-              <a:t>• DELETE 处理器改名 onRequestDelete（commit 204e76f）</a:t>
+                  <a:srgbClr val="9CA3AF"/>
+                </a:solidFill>
+                <a:latin typeface="Microsoft YaHei" pitchFamily="34" charset="0"/>
+                <a:ea typeface="Microsoft YaHei" pitchFamily="34" charset="-122"/>
+                <a:cs typeface="Microsoft YaHei" pitchFamily="34" charset="-120"/>
+              </a:rPr>
+              <a:t>•DELETE处理器改名onRequestDelete</a:t>
             </a:r>
             <a:endParaRPr lang="en-US" sz="1000" dirty="0"/>
           </a:p>
           <a:p>
-            <a:pPr algn="l" indent="0" marL="0">
+            <a:pPr indent="0" marL="0">
               <a:lnSpc>
                 <a:spcPct val="120000"/>
               </a:lnSpc>
@@ -3304,18 +3281,18 @@
             <a:r>
               <a:rPr lang="en-US" sz="1000" dirty="0">
                 <a:solidFill>
-                  <a:srgbClr val="8A8A8A"/>
-                </a:solidFill>
-                <a:latin typeface="Microsoft YaHei" pitchFamily="34" charset="0"/>
-                <a:ea typeface="Microsoft YaHei" pitchFamily="34" charset="-122"/>
-                <a:cs typeface="Microsoft YaHei" pitchFamily="34" charset="-120"/>
-              </a:rPr>
-              <a:t>• 线上 Functions 的 402 分支改返回 429（commit b3a1fa3）</a:t>
+                  <a:srgbClr val="9CA3AF"/>
+                </a:solidFill>
+                <a:latin typeface="Microsoft YaHei" pitchFamily="34" charset="0"/>
+                <a:ea typeface="Microsoft YaHei" pitchFamily="34" charset="-122"/>
+                <a:cs typeface="Microsoft YaHei" pitchFamily="34" charset="-120"/>
+              </a:rPr>
+              <a:t>•线上402分支改返回429</a:t>
             </a:r>
             <a:endParaRPr lang="en-US" sz="1000" dirty="0"/>
           </a:p>
           <a:p>
-            <a:pPr algn="l" indent="0" marL="0">
+            <a:pPr indent="0" marL="0">
               <a:lnSpc>
                 <a:spcPct val="120000"/>
               </a:lnSpc>
@@ -3324,13 +3301,13 @@
             <a:r>
               <a:rPr lang="en-US" sz="1000" dirty="0">
                 <a:solidFill>
-                  <a:srgbClr val="8A8A8A"/>
-                </a:solidFill>
-                <a:latin typeface="Microsoft YaHei" pitchFamily="34" charset="0"/>
-                <a:ea typeface="Microsoft YaHei" pitchFamily="34" charset="-122"/>
-                <a:cs typeface="Microsoft YaHei" pitchFamily="34" charset="-120"/>
-              </a:rPr>
-              <a:t>• 与本地 backend/ai.js 的 QUOTA→429 映射对齐</a:t>
+                  <a:srgbClr val="9CA3AF"/>
+                </a:solidFill>
+                <a:latin typeface="Microsoft YaHei" pitchFamily="34" charset="0"/>
+                <a:ea typeface="Microsoft YaHei" pitchFamily="34" charset="-122"/>
+                <a:cs typeface="Microsoft YaHei" pitchFamily="34" charset="-120"/>
+              </a:rPr>
+              <a:t>•与本地backend/ai.js的QUOTA→429映射对齐</a:t>
             </a:r>
             <a:endParaRPr lang="en-US" sz="1000" dirty="0"/>
           </a:p>
@@ -3351,32 +3328,31 @@
             <a:avLst/>
           </a:prstGeom>
           <a:solidFill>
-            <a:srgbClr val="1A2128"/>
+            <a:srgbClr val="283142"/>
           </a:solidFill>
           <a:ln w="12700">
             <a:solidFill>
-              <a:srgbClr val="4DD0A7"/>
+              <a:srgbClr val="A3B899"/>
             </a:solidFill>
-            <a:prstDash val="solid"/>
           </a:ln>
         </p:spPr>
         <p:txBody>
           <a:bodyPr wrap="square" rtlCol="0" anchor="ctr"/>
           <a:lstStyle/>
           <a:p>
-            <a:pPr algn="l" indent="0" marL="0">
+            <a:pPr indent="0" marL="0">
               <a:buNone/>
             </a:pPr>
             <a:r>
               <a:rPr lang="en-US" sz="1000" i="1" dirty="0">
                 <a:solidFill>
-                  <a:srgbClr val="E6E6E6"/>
-                </a:solidFill>
-                <a:latin typeface="Microsoft YaHei" pitchFamily="34" charset="0"/>
-                <a:ea typeface="Microsoft YaHei" pitchFamily="34" charset="-122"/>
-                <a:cs typeface="Microsoft YaHei" pitchFamily="34" charset="-120"/>
-              </a:rPr>
-              <a:t>结果：本地与线上同代码同行为，AI 助手失败兜底一致。</a:t>
+                  <a:srgbClr val="D4D4D8"/>
+                </a:solidFill>
+                <a:latin typeface="Microsoft YaHei" pitchFamily="34" charset="0"/>
+                <a:ea typeface="Microsoft YaHei" pitchFamily="34" charset="-122"/>
+                <a:cs typeface="Microsoft YaHei" pitchFamily="34" charset="-120"/>
+              </a:rPr>
+              <a:t>结果：本地与线上同代码同行为，AI助手失败兜底一致。</a:t>
             </a:r>
             <a:endParaRPr lang="en-US" sz="1000" dirty="0"/>
           </a:p>
@@ -3396,7 +3372,7 @@
     <p:bg>
       <p:bgPr>
         <a:solidFill>
-          <a:srgbClr val="0F1419"/>
+          <a:srgbClr val="1E2530"/>
         </a:solidFill>
       </p:bgPr>
     </p:bg>
@@ -3441,13 +3417,13 @@
             <a:r>
               <a:rPr lang="en-US" sz="2400" b="1" dirty="0">
                 <a:solidFill>
-                  <a:srgbClr val="4DD0A7"/>
-                </a:solidFill>
-                <a:latin typeface="Microsoft YaHei" pitchFamily="34" charset="0"/>
-                <a:ea typeface="Microsoft YaHei" pitchFamily="34" charset="-122"/>
-                <a:cs typeface="Microsoft YaHei" pitchFamily="34" charset="-120"/>
-              </a:rPr>
-              <a:t>05  测试可重入性 + 总结</a:t>
+                  <a:srgbClr val="A3B899"/>
+                </a:solidFill>
+                <a:latin typeface="Microsoft YaHei" pitchFamily="34" charset="0"/>
+                <a:ea typeface="Microsoft YaHei" pitchFamily="34" charset="-122"/>
+                <a:cs typeface="Microsoft YaHei" pitchFamily="34" charset="-120"/>
+              </a:rPr>
+              <a:t>05  测试可重入性+总结</a:t>
             </a:r>
             <a:endParaRPr lang="en-US" sz="2400" dirty="0"/>
           </a:p>
@@ -3468,11 +3444,11 @@
             <a:avLst/>
           </a:prstGeom>
           <a:solidFill>
-            <a:srgbClr val="2A1A1A"/>
+            <a:srgbClr val="2D2828"/>
           </a:solidFill>
           <a:ln w="12700">
             <a:solidFill>
-              <a:srgbClr val="FF6B6B"/>
+              <a:srgbClr val="D4A5A5"/>
             </a:solidFill>
             <a:prstDash val="solid"/>
           </a:ln>
@@ -3499,13 +3475,13 @@
           <a:bodyPr wrap="square" rtlCol="0" anchor="ctr"/>
           <a:lstStyle/>
           <a:p>
-            <a:pPr algn="l" indent="0" marL="0">
+            <a:pPr indent="0" marL="0">
               <a:buNone/>
             </a:pPr>
             <a:r>
               <a:rPr lang="en-US" sz="1000" b="1" dirty="0">
                 <a:solidFill>
-                  <a:srgbClr val="FF6B6B"/>
+                  <a:srgbClr val="D4A5A5"/>
                 </a:solidFill>
                 <a:latin typeface="Microsoft YaHei" pitchFamily="34" charset="0"/>
                 <a:ea typeface="Microsoft YaHei" pitchFamily="34" charset="-122"/>
@@ -3538,13 +3514,13 @@
           <a:bodyPr wrap="square" rtlCol="0" anchor="ctr"/>
           <a:lstStyle/>
           <a:p>
-            <a:pPr algn="l" indent="0" marL="0">
+            <a:pPr indent="0" marL="0">
               <a:buNone/>
             </a:pPr>
             <a:r>
               <a:rPr lang="en-US" sz="1300" b="1" dirty="0">
                 <a:solidFill>
-                  <a:srgbClr val="E6E6E6"/>
+                  <a:srgbClr val="D4D4D8"/>
                 </a:solidFill>
                 <a:latin typeface="Microsoft YaHei" pitchFamily="34" charset="0"/>
                 <a:ea typeface="Microsoft YaHei" pitchFamily="34" charset="-122"/>
@@ -3577,7 +3553,7 @@
           <a:bodyPr wrap="square" rtlCol="0" anchor="t"/>
           <a:lstStyle/>
           <a:p>
-            <a:pPr algn="l" indent="0" marL="0">
+            <a:pPr indent="0" marL="0">
               <a:lnSpc>
                 <a:spcPct val="120000"/>
               </a:lnSpc>
@@ -3586,18 +3562,18 @@
             <a:r>
               <a:rPr lang="en-US" sz="1000" dirty="0">
                 <a:solidFill>
-                  <a:srgbClr val="8A8A8A"/>
-                </a:solidFill>
-                <a:latin typeface="Microsoft YaHei" pitchFamily="34" charset="0"/>
-                <a:ea typeface="Microsoft YaHei" pitchFamily="34" charset="-122"/>
-                <a:cs typeface="Microsoft YaHei" pitchFamily="34" charset="-120"/>
-              </a:rPr>
-              <a:t>• Node 22 Windows 下 --test tests/ 报 Cannot find module</a:t>
+                  <a:srgbClr val="9CA3AF"/>
+                </a:solidFill>
+                <a:latin typeface="Microsoft YaHei" pitchFamily="34" charset="0"/>
+                <a:ea typeface="Microsoft YaHei" pitchFamily="34" charset="-122"/>
+                <a:cs typeface="Microsoft YaHei" pitchFamily="34" charset="-120"/>
+              </a:rPr>
+              <a:t>•Node22 Windows下--test tests/报Cannot find module</a:t>
             </a:r>
             <a:endParaRPr lang="en-US" sz="1000" dirty="0"/>
           </a:p>
           <a:p>
-            <a:pPr algn="l" indent="0" marL="0">
+            <a:pPr indent="0" marL="0">
               <a:lnSpc>
                 <a:spcPct val="120000"/>
               </a:lnSpc>
@@ -3606,18 +3582,18 @@
             <a:r>
               <a:rPr lang="en-US" sz="1000" dirty="0">
                 <a:solidFill>
-                  <a:srgbClr val="8A8A8A"/>
-                </a:solidFill>
-                <a:latin typeface="Microsoft YaHei" pitchFamily="34" charset="0"/>
-                <a:ea typeface="Microsoft YaHei" pitchFamily="34" charset="-122"/>
-                <a:cs typeface="Microsoft YaHei" pitchFamily="34" charset="-120"/>
-              </a:rPr>
-              <a:t>• 断言消息里 await res.text() 提前消费响应流</a:t>
+                  <a:srgbClr val="9CA3AF"/>
+                </a:solidFill>
+                <a:latin typeface="Microsoft YaHei" pitchFamily="34" charset="0"/>
+                <a:ea typeface="Microsoft YaHei" pitchFamily="34" charset="-122"/>
+                <a:cs typeface="Microsoft YaHei" pitchFamily="34" charset="-120"/>
+              </a:rPr>
+              <a:t>•断言消息里await res.text()提前消费响应流</a:t>
             </a:r>
             <a:endParaRPr lang="en-US" sz="1000" dirty="0"/>
           </a:p>
           <a:p>
-            <a:pPr algn="l" indent="0" marL="0">
+            <a:pPr indent="0" marL="0">
               <a:lnSpc>
                 <a:spcPct val="120000"/>
               </a:lnSpc>
@@ -3626,13 +3602,13 @@
             <a:r>
               <a:rPr lang="en-US" sz="1000" dirty="0">
                 <a:solidFill>
-                  <a:srgbClr val="8A8A8A"/>
-                </a:solidFill>
-                <a:latin typeface="Microsoft YaHei" pitchFamily="34" charset="0"/>
-                <a:ea typeface="Microsoft YaHei" pitchFamily="34" charset="-122"/>
-                <a:cs typeface="Microsoft YaHei" pitchFamily="34" charset="-120"/>
-              </a:rPr>
-              <a:t>• 用例未清理残留数据，共用互斥键连锁 409</a:t>
+                  <a:srgbClr val="9CA3AF"/>
+                </a:solidFill>
+                <a:latin typeface="Microsoft YaHei" pitchFamily="34" charset="0"/>
+                <a:ea typeface="Microsoft YaHei" pitchFamily="34" charset="-122"/>
+                <a:cs typeface="Microsoft YaHei" pitchFamily="34" charset="-120"/>
+              </a:rPr>
+              <a:t>•用例未清理残留数据，共用互斥键连锁409</a:t>
             </a:r>
             <a:endParaRPr lang="en-US" sz="1000" dirty="0"/>
           </a:p>
@@ -3653,11 +3629,11 @@
             <a:avLst/>
           </a:prstGeom>
           <a:solidFill>
-            <a:srgbClr val="1A2128"/>
+            <a:srgbClr val="283142"/>
           </a:solidFill>
           <a:ln w="12700">
             <a:solidFill>
-              <a:srgbClr val="4DD0A7"/>
+              <a:srgbClr val="A3B899"/>
             </a:solidFill>
             <a:prstDash val="solid"/>
           </a:ln>
@@ -3684,13 +3660,13 @@
           <a:bodyPr wrap="square" rtlCol="0" anchor="ctr"/>
           <a:lstStyle/>
           <a:p>
-            <a:pPr algn="l" indent="0" marL="0">
+            <a:pPr indent="0" marL="0">
               <a:buNone/>
             </a:pPr>
             <a:r>
               <a:rPr lang="en-US" sz="1000" b="1" dirty="0">
                 <a:solidFill>
-                  <a:srgbClr val="4DD0A7"/>
+                  <a:srgbClr val="A3B899"/>
                 </a:solidFill>
                 <a:latin typeface="Microsoft YaHei" pitchFamily="34" charset="0"/>
                 <a:ea typeface="Microsoft YaHei" pitchFamily="34" charset="-122"/>
@@ -3723,13 +3699,13 @@
           <a:bodyPr wrap="square" rtlCol="0" anchor="ctr"/>
           <a:lstStyle/>
           <a:p>
-            <a:pPr algn="l" indent="0" marL="0">
+            <a:pPr indent="0" marL="0">
               <a:buNone/>
             </a:pPr>
             <a:r>
               <a:rPr lang="en-US" sz="1300" b="1" dirty="0">
                 <a:solidFill>
-                  <a:srgbClr val="E6E6E6"/>
+                  <a:srgbClr val="D4D4D8"/>
                 </a:solidFill>
                 <a:latin typeface="Microsoft YaHei" pitchFamily="34" charset="0"/>
                 <a:ea typeface="Microsoft YaHei" pitchFamily="34" charset="-122"/>
@@ -3762,7 +3738,7 @@
           <a:bodyPr wrap="square" rtlCol="0" anchor="t"/>
           <a:lstStyle/>
           <a:p>
-            <a:pPr algn="l" indent="0" marL="0">
+            <a:pPr indent="0" marL="0">
               <a:lnSpc>
                 <a:spcPct val="120000"/>
               </a:lnSpc>
@@ -3771,18 +3747,18 @@
             <a:r>
               <a:rPr lang="en-US" sz="1000" dirty="0">
                 <a:solidFill>
-                  <a:srgbClr val="8A8A8A"/>
-                </a:solidFill>
-                <a:latin typeface="Microsoft YaHei" pitchFamily="34" charset="0"/>
-                <a:ea typeface="Microsoft YaHei" pitchFamily="34" charset="-122"/>
-                <a:cs typeface="Microsoft YaHei" pitchFamily="34" charset="-120"/>
-              </a:rPr>
-              <a:t>• 改 --test tests/api.test.js（具体文件路径）</a:t>
+                  <a:srgbClr val="9CA3AF"/>
+                </a:solidFill>
+                <a:latin typeface="Microsoft YaHei" pitchFamily="34" charset="0"/>
+                <a:ea typeface="Microsoft YaHei" pitchFamily="34" charset="-122"/>
+                <a:cs typeface="Microsoft YaHei" pitchFamily="34" charset="-120"/>
+              </a:rPr>
+              <a:t>•改--test tests/api.test.js</a:t>
             </a:r>
             <a:endParaRPr lang="en-US" sz="1000" dirty="0"/>
           </a:p>
           <a:p>
-            <a:pPr algn="l" indent="0" marL="0">
+            <a:pPr indent="0" marL="0">
               <a:lnSpc>
                 <a:spcPct val="120000"/>
               </a:lnSpc>
@@ -3791,18 +3767,18 @@
             <a:r>
               <a:rPr lang="en-US" sz="1000" dirty="0">
                 <a:solidFill>
-                  <a:srgbClr val="8A8A8A"/>
-                </a:solidFill>
-                <a:latin typeface="Microsoft YaHei" pitchFamily="34" charset="0"/>
-                <a:ea typeface="Microsoft YaHei" pitchFamily="34" charset="-122"/>
-                <a:cs typeface="Microsoft YaHei" pitchFamily="34" charset="-120"/>
-              </a:rPr>
-              <a:t>• 先读 body 再断言（createOk 辅助函数）</a:t>
+                  <a:srgbClr val="9CA3AF"/>
+                </a:solidFill>
+                <a:latin typeface="Microsoft YaHei" pitchFamily="34" charset="0"/>
+                <a:ea typeface="Microsoft YaHei" pitchFamily="34" charset="-122"/>
+                <a:cs typeface="Microsoft YaHei" pitchFamily="34" charset="-120"/>
+              </a:rPr>
+              <a:t>•先读body再断言（createOk辅助函数）</a:t>
             </a:r>
             <a:endParaRPr lang="en-US" sz="1000" dirty="0"/>
           </a:p>
           <a:p>
-            <a:pPr algn="l" indent="0" marL="0">
+            <a:pPr indent="0" marL="0">
               <a:lnSpc>
                 <a:spcPct val="120000"/>
               </a:lnSpc>
@@ -3811,13 +3787,13 @@
             <a:r>
               <a:rPr lang="en-US" sz="1000" dirty="0">
                 <a:solidFill>
-                  <a:srgbClr val="8A8A8A"/>
-                </a:solidFill>
-                <a:latin typeface="Microsoft YaHei" pitchFamily="34" charset="0"/>
-                <a:ea typeface="Microsoft YaHei" pitchFamily="34" charset="-122"/>
-                <a:cs typeface="Microsoft YaHei" pitchFamily="34" charset="-120"/>
-              </a:rPr>
-              <a:t>• before 钩子清库 + 用例 try/finally 自清</a:t>
+                  <a:srgbClr val="9CA3AF"/>
+                </a:solidFill>
+                <a:latin typeface="Microsoft YaHei" pitchFamily="34" charset="0"/>
+                <a:ea typeface="Microsoft YaHei" pitchFamily="34" charset="-122"/>
+                <a:cs typeface="Microsoft YaHei" pitchFamily="34" charset="-120"/>
+              </a:rPr>
+              <a:t>•before钩子清库+用例try/finally自清</a:t>
             </a:r>
             <a:endParaRPr lang="en-US" sz="1000" dirty="0"/>
           </a:p>
@@ -3838,32 +3814,31 @@
             <a:avLst/>
           </a:prstGeom>
           <a:solidFill>
-            <a:srgbClr val="1A2128"/>
+            <a:srgbClr val="283142"/>
           </a:solidFill>
           <a:ln w="12700">
             <a:solidFill>
-              <a:srgbClr val="4DD0A7"/>
+              <a:srgbClr val="A3B899"/>
             </a:solidFill>
-            <a:prstDash val="solid"/>
           </a:ln>
         </p:spPr>
         <p:txBody>
           <a:bodyPr wrap="square" rtlCol="0" anchor="ctr"/>
           <a:lstStyle/>
           <a:p>
-            <a:pPr algn="l" indent="0" marL="0">
+            <a:pPr indent="0" marL="0">
               <a:buNone/>
             </a:pPr>
             <a:r>
               <a:rPr lang="en-US" sz="1000" i="1" dirty="0">
                 <a:solidFill>
-                  <a:srgbClr val="E6E6E6"/>
-                </a:solidFill>
-                <a:latin typeface="Microsoft YaHei" pitchFamily="34" charset="0"/>
-                <a:ea typeface="Microsoft YaHei" pitchFamily="34" charset="-122"/>
-                <a:cs typeface="Microsoft YaHei" pitchFamily="34" charset="-120"/>
-              </a:rPr>
-              <a:t>5 条业务规则全绿且连跑可重入；业务代码零改动。所有问题已闭环，现场能跑：https://caojunyue.pages.dev/</a:t>
+                  <a:srgbClr val="D4D4D8"/>
+                </a:solidFill>
+                <a:latin typeface="Microsoft YaHei" pitchFamily="34" charset="0"/>
+                <a:ea typeface="Microsoft YaHei" pitchFamily="34" charset="-122"/>
+                <a:cs typeface="Microsoft YaHei" pitchFamily="34" charset="-120"/>
+              </a:rPr>
+              <a:t>5条业务规则全绿且连跑可重入；业务代码零改动。所有问题已闭环，现场能跑：https://caojunyue.pages.dev/</a:t>
             </a:r>
             <a:endParaRPr lang="en-US" sz="1000" dirty="0"/>
           </a:p>

--- a/docs/路演PPT.pptx
+++ b/docs/路演PPT.pptx
@@ -1751,7 +1751,7 @@
           <a:p>
             <a:pPr indent="0" marL="0">
               <a:lnSpc>
-                <a:spcPct val="120000"/>
+                <a:spcPct val="130000"/>
               </a:lnSpc>
               <a:buNone/>
             </a:pPr>
@@ -1896,7 +1896,7 @@
           <a:p>
             <a:pPr indent="0" marL="0">
               <a:lnSpc>
-                <a:spcPct val="120000"/>
+                <a:spcPct val="130000"/>
               </a:lnSpc>
               <a:buNone/>
             </a:pPr>
@@ -2025,7 +2025,7 @@
                 <a:ea typeface="Microsoft YaHei" pitchFamily="34" charset="-122"/>
                 <a:cs typeface="Microsoft YaHei" pitchFamily="34" charset="-120"/>
               </a:rPr>
-              <a:t>02  互斥判重从前端迁到服务端</a:t>
+              <a:t>02  换个设备就撞单？</a:t>
             </a:r>
             <a:endParaRPr lang="en-US" sz="2400" dirty="0"/>
           </a:p>
@@ -2128,7 +2128,7 @@
                 <a:ea typeface="Microsoft YaHei" pitchFamily="34" charset="-122"/>
                 <a:cs typeface="Microsoft YaHei" pitchFamily="34" charset="-120"/>
               </a:rPr>
-              <a:t>localStorage前端判重跨设备失效</a:t>
+              <a:t>v1只在自己浏览器里记</a:t>
             </a:r>
             <a:endParaRPr lang="en-US" sz="1300" dirty="0"/>
           </a:p>
@@ -2157,7 +2157,7 @@
           <a:p>
             <a:pPr indent="0" marL="0">
               <a:lnSpc>
-                <a:spcPct val="120000"/>
+                <a:spcPct val="130000"/>
               </a:lnSpc>
               <a:buNone/>
             </a:pPr>
@@ -2170,7 +2170,7 @@
                 <a:ea typeface="Microsoft YaHei" pitchFamily="34" charset="-122"/>
                 <a:cs typeface="Microsoft YaHei" pitchFamily="34" charset="-120"/>
               </a:rPr>
-              <a:t>v1用浏览器localStorage存预约+前端判重：A设备约了，B设备看不到，会撞单；清缓存后判重数据全丢。</a:t>
+              <a:t>同学A在电脑上约了投影仪，同学B手机打开页面——电脑记的事手机看不到，B又约了同一时段，撞单了！</a:t>
             </a:r>
             <a:endParaRPr lang="en-US" sz="1000" dirty="0"/>
           </a:p>
@@ -2273,7 +2273,7 @@
                 <a:ea typeface="Microsoft YaHei" pitchFamily="34" charset="-122"/>
                 <a:cs typeface="Microsoft YaHei" pitchFamily="34" charset="-120"/>
               </a:rPr>
-              <a:t>服务端数据库唯一索引+409</a:t>
+              <a:t>把"不能撞"钉死在数据库</a:t>
             </a:r>
             <a:endParaRPr lang="en-US" sz="1300" dirty="0"/>
           </a:p>
@@ -2302,7 +2302,7 @@
           <a:p>
             <a:pPr indent="0" marL="0">
               <a:lnSpc>
-                <a:spcPct val="120000"/>
+                <a:spcPct val="130000"/>
               </a:lnSpc>
               <a:buNone/>
             </a:pPr>
@@ -2315,7 +2315,7 @@
                 <a:ea typeface="Microsoft YaHei" pitchFamily="34" charset="-122"/>
                 <a:cs typeface="Microsoft YaHei" pitchFamily="34" charset="-120"/>
               </a:rPr>
-              <a:t>schema.sql建UNIQUE(equip_id,date,slot)；POST冲突返回409；前端不再本地判重，以服务端409为唯一事实源。</a:t>
+              <a:t>预约规则从浏览器搬到服务器：任何设备来约，服务器先查数据库——有冲突直接拒，前端只管提交不管判。</a:t>
             </a:r>
             <a:endParaRPr lang="en-US" sz="1000" dirty="0"/>
           </a:p>
@@ -2360,7 +2360,7 @@
                 <a:ea typeface="Microsoft YaHei" pitchFamily="34" charset="-122"/>
                 <a:cs typeface="Microsoft YaHei" pitchFamily="34" charset="-120"/>
               </a:rPr>
-              <a:t>结果：跨设备撞单由数据库兜底，前端v1 localStorage判重逻辑已废弃。</a:t>
+              <a:t>结果：跨设备再也撞不了单，前端那套旧逻辑直接废掉。</a:t>
             </a:r>
             <a:endParaRPr lang="en-US" sz="1000" dirty="0"/>
           </a:p>
@@ -2431,7 +2431,7 @@
                 <a:ea typeface="Microsoft YaHei" pitchFamily="34" charset="-122"/>
                 <a:cs typeface="Microsoft YaHei" pitchFamily="34" charset="-120"/>
               </a:rPr>
-              <a:t>03  CI踩坑（Gitee Go）</a:t>
+              <a:t>03  CI流水线按文档写的跑不起来</a:t>
             </a:r>
             <a:endParaRPr lang="en-US" sz="2400" dirty="0"/>
           </a:p>
@@ -2534,7 +2534,7 @@
                 <a:ea typeface="Microsoft YaHei" pitchFamily="34" charset="-122"/>
                 <a:cs typeface="Microsoft YaHei" pitchFamily="34" charset="-120"/>
               </a:rPr>
-              <a:t>YAML schema与直觉不同+通知不可达</a:t>
+              <a:t>Gitee Go处处是"默认"</a:t>
             </a:r>
             <a:endParaRPr lang="en-US" sz="1300" dirty="0"/>
           </a:p>
@@ -2563,7 +2563,7 @@
           <a:p>
             <a:pPr indent="0" marL="0">
               <a:lnSpc>
-                <a:spcPct val="120000"/>
+                <a:spcPct val="130000"/>
               </a:lnSpc>
               <a:buNone/>
             </a:pPr>
@@ -2576,67 +2576,7 @@
                 <a:ea typeface="Microsoft YaHei" pitchFamily="34" charset="-122"/>
                 <a:cs typeface="Microsoft YaHei" pitchFamily="34" charset="-120"/>
               </a:rPr>
-              <a:t>•commands多行块报错</a:t>
-            </a:r>
-            <a:endParaRPr lang="en-US" sz="1000" dirty="0"/>
-          </a:p>
-          <a:p>
-            <a:pPr indent="0" marL="0">
-              <a:lnSpc>
-                <a:spcPct val="120000"/>
-              </a:lnSpc>
-              <a:buNone/>
-            </a:pPr>
-            <a:r>
-              <a:rPr lang="en-US" sz="1000" dirty="0">
-                <a:solidFill>
-                  <a:srgbClr val="9CA3AF"/>
-                </a:solidFill>
-                <a:latin typeface="Microsoft YaHei" pitchFamily="34" charset="0"/>
-                <a:ea typeface="Microsoft YaHei" pitchFamily="34" charset="-122"/>
-                <a:cs typeface="Microsoft YaHei" pitchFamily="34" charset="-120"/>
-              </a:rPr>
-              <a:t>•按分支发现YAML，主线main但默认master</a:t>
-            </a:r>
-            <a:endParaRPr lang="en-US" sz="1000" dirty="0"/>
-          </a:p>
-          <a:p>
-            <a:pPr indent="0" marL="0">
-              <a:lnSpc>
-                <a:spcPct val="120000"/>
-              </a:lnSpc>
-              <a:buNone/>
-            </a:pPr>
-            <a:r>
-              <a:rPr lang="en-US" sz="1000" dirty="0">
-                <a:solidFill>
-                  <a:srgbClr val="9CA3AF"/>
-                </a:solidFill>
-                <a:latin typeface="Microsoft YaHei" pitchFamily="34" charset="0"/>
-                <a:ea typeface="Microsoft YaHei" pitchFamily="34" charset="-122"/>
-                <a:cs typeface="Microsoft YaHei" pitchFamily="34" charset="-120"/>
-              </a:rPr>
-              <a:t>•社区版站内信/邮件均收不到</a:t>
-            </a:r>
-            <a:endParaRPr lang="en-US" sz="1000" dirty="0"/>
-          </a:p>
-          <a:p>
-            <a:pPr indent="0" marL="0">
-              <a:lnSpc>
-                <a:spcPct val="120000"/>
-              </a:lnSpc>
-              <a:buNone/>
-            </a:pPr>
-            <a:r>
-              <a:rPr lang="en-US" sz="1000" dirty="0">
-                <a:solidFill>
-                  <a:srgbClr val="9CA3AF"/>
-                </a:solidFill>
-                <a:latin typeface="Microsoft YaHei" pitchFamily="34" charset="0"/>
-                <a:ea typeface="Microsoft YaHei" pitchFamily="34" charset="-122"/>
-                <a:cs typeface="Microsoft YaHei" pitchFamily="34" charset="-120"/>
-              </a:rPr>
-              <a:t>•build@nodejs插件最高15.x，跑不了node:sqlite</a:t>
+              <a:t>按教程写的配置格式不对、分支对不上、自带的Node版本太低跑不了我们的代码——推上去全红。</a:t>
             </a:r>
             <a:endParaRPr lang="en-US" sz="1000" dirty="0"/>
           </a:p>
@@ -2739,7 +2679,7 @@
                 <a:ea typeface="Microsoft YaHei" pitchFamily="34" charset="-122"/>
                 <a:cs typeface="Microsoft YaHei" pitchFamily="34" charset="-120"/>
               </a:rPr>
-              <a:t>按schema重写+双分支同步</a:t>
+              <a:t>照它的脾气改，装它没有的</a:t>
             </a:r>
             <a:endParaRPr lang="en-US" sz="1300" dirty="0"/>
           </a:p>
@@ -2768,7 +2708,7 @@
           <a:p>
             <a:pPr indent="0" marL="0">
               <a:lnSpc>
-                <a:spcPct val="120000"/>
+                <a:spcPct val="130000"/>
               </a:lnSpc>
               <a:buNone/>
             </a:pPr>
@@ -2781,67 +2721,7 @@
                 <a:ea typeface="Microsoft YaHei" pitchFamily="34" charset="-122"/>
                 <a:cs typeface="Microsoft YaHei" pitchFamily="34" charset="-120"/>
               </a:rPr>
-              <a:t>•commands改字符串列表</a:t>
-            </a:r>
-            <a:endParaRPr lang="en-US" sz="1000" dirty="0"/>
-          </a:p>
-          <a:p>
-            <a:pPr indent="0" marL="0">
-              <a:lnSpc>
-                <a:spcPct val="120000"/>
-              </a:lnSpc>
-              <a:buNone/>
-            </a:pPr>
-            <a:r>
-              <a:rPr lang="en-US" sz="1000" dirty="0">
-                <a:solidFill>
-                  <a:srgbClr val="9CA3AF"/>
-                </a:solidFill>
-                <a:latin typeface="Microsoft YaHei" pitchFamily="34" charset="0"/>
-                <a:ea typeface="Microsoft YaHei" pitchFamily="34" charset="-122"/>
-                <a:cs typeface="Microsoft YaHei" pitchFamily="34" charset="-120"/>
-              </a:rPr>
-              <a:t>•git push origin main:master同步</a:t>
-            </a:r>
-            <a:endParaRPr lang="en-US" sz="1000" dirty="0"/>
-          </a:p>
-          <a:p>
-            <a:pPr indent="0" marL="0">
-              <a:lnSpc>
-                <a:spcPct val="120000"/>
-              </a:lnSpc>
-              <a:buNone/>
-            </a:pPr>
-            <a:r>
-              <a:rPr lang="en-US" sz="1000" dirty="0">
-                <a:solidFill>
-                  <a:srgbClr val="9CA3AF"/>
-                </a:solidFill>
-                <a:latin typeface="Microsoft YaHei" pitchFamily="34" charset="0"/>
-                <a:ea typeface="Microsoft YaHei" pitchFamily="34" charset="-122"/>
-                <a:cs typeface="Microsoft YaHei" pitchFamily="34" charset="-120"/>
-              </a:rPr>
-              <a:t>•以构建历史页状态为准</a:t>
-            </a:r>
-            <a:endParaRPr lang="en-US" sz="1000" dirty="0"/>
-          </a:p>
-          <a:p>
-            <a:pPr indent="0" marL="0">
-              <a:lnSpc>
-                <a:spcPct val="120000"/>
-              </a:lnSpc>
-              <a:buNone/>
-            </a:pPr>
-            <a:r>
-              <a:rPr lang="en-US" sz="1000" dirty="0">
-                <a:solidFill>
-                  <a:srgbClr val="9CA3AF"/>
-                </a:solidFill>
-                <a:latin typeface="Microsoft YaHei" pitchFamily="34" charset="0"/>
-                <a:ea typeface="Microsoft YaHei" pitchFamily="34" charset="-122"/>
-                <a:cs typeface="Microsoft YaHei" pitchFamily="34" charset="-120"/>
-              </a:rPr>
-              <a:t>•npmmirror源自装Node22后npm test</a:t>
+              <a:t>按Gitee Go的格式重写配置、双分支同步、流水线里先装Node 22再跑测试——现在push自动验。</a:t>
             </a:r>
             <a:endParaRPr lang="en-US" sz="1000" dirty="0"/>
           </a:p>
@@ -2886,7 +2766,7 @@
                 <a:ea typeface="Microsoft YaHei" pitchFamily="34" charset="-122"/>
                 <a:cs typeface="Microsoft YaHei" pitchFamily="34" charset="-120"/>
               </a:rPr>
-              <a:t>结果：push→装依赖→跑测试全绿；故意失败验证CI拦截有效。</a:t>
+              <a:t>结果：push → 自动装依赖 → 自动跑测试全绿，故意写错能拦住。</a:t>
             </a:r>
             <a:endParaRPr lang="en-US" sz="1000" dirty="0"/>
           </a:p>
@@ -2957,7 +2837,7 @@
                 <a:ea typeface="Microsoft YaHei" pitchFamily="34" charset="-122"/>
                 <a:cs typeface="Microsoft YaHei" pitchFamily="34" charset="-120"/>
               </a:rPr>
-              <a:t>04  跨环境一致性</a:t>
+              <a:t>04  本地跑通，线上报错不一样</a:t>
             </a:r>
             <a:endParaRPr lang="en-US" sz="2400" dirty="0"/>
           </a:p>
@@ -3060,7 +2940,7 @@
                 <a:ea typeface="Microsoft YaHei" pitchFamily="34" charset="-122"/>
                 <a:cs typeface="Microsoft YaHei" pitchFamily="34" charset="-120"/>
               </a:rPr>
-              <a:t>Functions命名限制+402状态码不一致</a:t>
+              <a:t>AI助手失败了，用户看到两副面孔</a:t>
             </a:r>
             <a:endParaRPr lang="en-US" sz="1300" dirty="0"/>
           </a:p>
@@ -3089,7 +2969,7 @@
           <a:p>
             <a:pPr indent="0" marL="0">
               <a:lnSpc>
-                <a:spcPct val="120000"/>
+                <a:spcPct val="130000"/>
               </a:lnSpc>
               <a:buNone/>
             </a:pPr>
@@ -3102,27 +2982,7 @@
                 <a:ea typeface="Microsoft YaHei" pitchFamily="34" charset="-122"/>
                 <a:cs typeface="Microsoft YaHei" pitchFamily="34" charset="-120"/>
               </a:rPr>
-              <a:t>•DELETE处理器用onDelete命名→405</a:t>
-            </a:r>
-            <a:endParaRPr lang="en-US" sz="1000" dirty="0"/>
-          </a:p>
-          <a:p>
-            <a:pPr indent="0" marL="0">
-              <a:lnSpc>
-                <a:spcPct val="120000"/>
-              </a:lnSpc>
-              <a:buNone/>
-            </a:pPr>
-            <a:r>
-              <a:rPr lang="en-US" sz="1000" dirty="0">
-                <a:solidFill>
-                  <a:srgbClr val="9CA3AF"/>
-                </a:solidFill>
-                <a:latin typeface="Microsoft YaHei" pitchFamily="34" charset="0"/>
-                <a:ea typeface="Microsoft YaHei" pitchFamily="34" charset="-122"/>
-                <a:cs typeface="Microsoft YaHei" pitchFamily="34" charset="-120"/>
-              </a:rPr>
-              <a:t>•DeepSeek 402：本地映射QUOTA→429；线上Functions返回503</a:t>
+              <a:t>本地调AI额度用尽→提示"请稍后再试"，线上同样情况→提示"服务不可用"，同一个问题说两种话，用户懵了。</a:t>
             </a:r>
             <a:endParaRPr lang="en-US" sz="1000" dirty="0"/>
           </a:p>
@@ -3225,7 +3085,7 @@
                 <a:ea typeface="Microsoft YaHei" pitchFamily="34" charset="-122"/>
                 <a:cs typeface="Microsoft YaHei" pitchFamily="34" charset="-120"/>
               </a:rPr>
-              <a:t>对齐命名+统一状态码映射</a:t>
+              <a:t>对齐两端的错误码</a:t>
             </a:r>
             <a:endParaRPr lang="en-US" sz="1300" dirty="0"/>
           </a:p>
@@ -3254,7 +3114,7 @@
           <a:p>
             <a:pPr indent="0" marL="0">
               <a:lnSpc>
-                <a:spcPct val="120000"/>
+                <a:spcPct val="130000"/>
               </a:lnSpc>
               <a:buNone/>
             </a:pPr>
@@ -3267,47 +3127,7 @@
                 <a:ea typeface="Microsoft YaHei" pitchFamily="34" charset="-122"/>
                 <a:cs typeface="Microsoft YaHei" pitchFamily="34" charset="-120"/>
               </a:rPr>
-              <a:t>•DELETE处理器改名onRequestDelete</a:t>
-            </a:r>
-            <a:endParaRPr lang="en-US" sz="1000" dirty="0"/>
-          </a:p>
-          <a:p>
-            <a:pPr indent="0" marL="0">
-              <a:lnSpc>
-                <a:spcPct val="120000"/>
-              </a:lnSpc>
-              <a:buNone/>
-            </a:pPr>
-            <a:r>
-              <a:rPr lang="en-US" sz="1000" dirty="0">
-                <a:solidFill>
-                  <a:srgbClr val="9CA3AF"/>
-                </a:solidFill>
-                <a:latin typeface="Microsoft YaHei" pitchFamily="34" charset="0"/>
-                <a:ea typeface="Microsoft YaHei" pitchFamily="34" charset="-122"/>
-                <a:cs typeface="Microsoft YaHei" pitchFamily="34" charset="-120"/>
-              </a:rPr>
-              <a:t>•线上402分支改返回429</a:t>
-            </a:r>
-            <a:endParaRPr lang="en-US" sz="1000" dirty="0"/>
-          </a:p>
-          <a:p>
-            <a:pPr indent="0" marL="0">
-              <a:lnSpc>
-                <a:spcPct val="120000"/>
-              </a:lnSpc>
-              <a:buNone/>
-            </a:pPr>
-            <a:r>
-              <a:rPr lang="en-US" sz="1000" dirty="0">
-                <a:solidFill>
-                  <a:srgbClr val="9CA3AF"/>
-                </a:solidFill>
-                <a:latin typeface="Microsoft YaHei" pitchFamily="34" charset="0"/>
-                <a:ea typeface="Microsoft YaHei" pitchFamily="34" charset="-122"/>
-                <a:cs typeface="Microsoft YaHei" pitchFamily="34" charset="-120"/>
-              </a:rPr>
-              <a:t>•与本地backend/ai.js的QUOTA→429映射对齐</a:t>
+              <a:t>把线上和本地的错误提示统一映射，不管在哪跑、怎么跑，用户看到的提示永远一致。</a:t>
             </a:r>
             <a:endParaRPr lang="en-US" sz="1000" dirty="0"/>
           </a:p>
@@ -3352,7 +3172,7 @@
                 <a:ea typeface="Microsoft YaHei" pitchFamily="34" charset="-122"/>
                 <a:cs typeface="Microsoft YaHei" pitchFamily="34" charset="-120"/>
               </a:rPr>
-              <a:t>结果：本地与线上同代码同行为，AI助手失败兜底一致。</a:t>
+              <a:t>结果：本地与线上同代码同行为，AI助手兜底提示完全一致。</a:t>
             </a:r>
             <a:endParaRPr lang="en-US" sz="1000" dirty="0"/>
           </a:p>
@@ -3555,7 +3375,7 @@
           <a:p>
             <a:pPr indent="0" marL="0">
               <a:lnSpc>
-                <a:spcPct val="120000"/>
+                <a:spcPct val="130000"/>
               </a:lnSpc>
               <a:buNone/>
             </a:pPr>
@@ -3575,7 +3395,7 @@
           <a:p>
             <a:pPr indent="0" marL="0">
               <a:lnSpc>
-                <a:spcPct val="120000"/>
+                <a:spcPct val="130000"/>
               </a:lnSpc>
               <a:buNone/>
             </a:pPr>
@@ -3595,7 +3415,7 @@
           <a:p>
             <a:pPr indent="0" marL="0">
               <a:lnSpc>
-                <a:spcPct val="120000"/>
+                <a:spcPct val="130000"/>
               </a:lnSpc>
               <a:buNone/>
             </a:pPr>
@@ -3740,7 +3560,7 @@
           <a:p>
             <a:pPr indent="0" marL="0">
               <a:lnSpc>
-                <a:spcPct val="120000"/>
+                <a:spcPct val="130000"/>
               </a:lnSpc>
               <a:buNone/>
             </a:pPr>
@@ -3760,7 +3580,7 @@
           <a:p>
             <a:pPr indent="0" marL="0">
               <a:lnSpc>
-                <a:spcPct val="120000"/>
+                <a:spcPct val="130000"/>
               </a:lnSpc>
               <a:buNone/>
             </a:pPr>
@@ -3780,7 +3600,7 @@
           <a:p>
             <a:pPr indent="0" marL="0">
               <a:lnSpc>
-                <a:spcPct val="120000"/>
+                <a:spcPct val="130000"/>
               </a:lnSpc>
               <a:buNone/>
             </a:pPr>

--- a/docs/路演PPT.pptx
+++ b/docs/路演PPT.pptx
@@ -1683,7 +1683,7 @@
                 <a:ea typeface="Microsoft YaHei" pitchFamily="34" charset="-122"/>
                 <a:cs typeface="Microsoft YaHei" pitchFamily="34" charset="-120"/>
               </a:rPr>
-              <a:t>问题</a:t>
+              <a:t>踩过的坑</a:t>
             </a:r>
             <a:endParaRPr lang="en-US" sz="1000" dirty="0"/>
           </a:p>
@@ -1828,7 +1828,7 @@
                 <a:ea typeface="Microsoft YaHei" pitchFamily="34" charset="-122"/>
                 <a:cs typeface="Microsoft YaHei" pitchFamily="34" charset="-120"/>
               </a:rPr>
-              <a:t>解决</a:t>
+              <a:t>我们改了什么</a:t>
             </a:r>
             <a:endParaRPr lang="en-US" sz="1000" dirty="0"/>
           </a:p>
@@ -2089,7 +2089,7 @@
                 <a:ea typeface="Microsoft YaHei" pitchFamily="34" charset="-122"/>
                 <a:cs typeface="Microsoft YaHei" pitchFamily="34" charset="-120"/>
               </a:rPr>
-              <a:t>问题</a:t>
+              <a:t>踩过的坑</a:t>
             </a:r>
             <a:endParaRPr lang="en-US" sz="1000" dirty="0"/>
           </a:p>
@@ -2234,7 +2234,7 @@
                 <a:ea typeface="Microsoft YaHei" pitchFamily="34" charset="-122"/>
                 <a:cs typeface="Microsoft YaHei" pitchFamily="34" charset="-120"/>
               </a:rPr>
-              <a:t>解决</a:t>
+              <a:t>我们改了什么</a:t>
             </a:r>
             <a:endParaRPr lang="en-US" sz="1000" dirty="0"/>
           </a:p>
@@ -2495,7 +2495,7 @@
                 <a:ea typeface="Microsoft YaHei" pitchFamily="34" charset="-122"/>
                 <a:cs typeface="Microsoft YaHei" pitchFamily="34" charset="-120"/>
               </a:rPr>
-              <a:t>问题</a:t>
+              <a:t>踩过的坑</a:t>
             </a:r>
             <a:endParaRPr lang="en-US" sz="1000" dirty="0"/>
           </a:p>
@@ -2640,7 +2640,7 @@
                 <a:ea typeface="Microsoft YaHei" pitchFamily="34" charset="-122"/>
                 <a:cs typeface="Microsoft YaHei" pitchFamily="34" charset="-120"/>
               </a:rPr>
-              <a:t>解决</a:t>
+              <a:t>我们改了什么</a:t>
             </a:r>
             <a:endParaRPr lang="en-US" sz="1000" dirty="0"/>
           </a:p>
@@ -2901,7 +2901,7 @@
                 <a:ea typeface="Microsoft YaHei" pitchFamily="34" charset="-122"/>
                 <a:cs typeface="Microsoft YaHei" pitchFamily="34" charset="-120"/>
               </a:rPr>
-              <a:t>问题</a:t>
+              <a:t>踩过的坑</a:t>
             </a:r>
             <a:endParaRPr lang="en-US" sz="1000" dirty="0"/>
           </a:p>
@@ -3046,7 +3046,7 @@
                 <a:ea typeface="Microsoft YaHei" pitchFamily="34" charset="-122"/>
                 <a:cs typeface="Microsoft YaHei" pitchFamily="34" charset="-120"/>
               </a:rPr>
-              <a:t>解决</a:t>
+              <a:t>我们改了什么</a:t>
             </a:r>
             <a:endParaRPr lang="en-US" sz="1000" dirty="0"/>
           </a:p>
@@ -3243,7 +3243,7 @@
                 <a:ea typeface="Microsoft YaHei" pitchFamily="34" charset="-122"/>
                 <a:cs typeface="Microsoft YaHei" pitchFamily="34" charset="-120"/>
               </a:rPr>
-              <a:t>05  测试可重入性+总结</a:t>
+              <a:t>05  总结：5个坑，5个闭环</a:t>
             </a:r>
             <a:endParaRPr lang="en-US" sz="2400" dirty="0"/>
           </a:p>
@@ -3307,7 +3307,7 @@
                 <a:ea typeface="Microsoft YaHei" pitchFamily="34" charset="-122"/>
                 <a:cs typeface="Microsoft YaHei" pitchFamily="34" charset="-120"/>
               </a:rPr>
-              <a:t>问题</a:t>
+              <a:t>踩过的坑</a:t>
             </a:r>
             <a:endParaRPr lang="en-US" sz="1000" dirty="0"/>
           </a:p>
@@ -3346,7 +3346,7 @@
                 <a:ea typeface="Microsoft YaHei" pitchFamily="34" charset="-122"/>
                 <a:cs typeface="Microsoft YaHei" pitchFamily="34" charset="-120"/>
               </a:rPr>
-              <a:t>测试跑挂三连击</a:t>
+              <a:t>从部署到测试，处处是"默认"</a:t>
             </a:r>
             <a:endParaRPr lang="en-US" sz="1300" dirty="0"/>
           </a:p>
@@ -3388,7 +3388,7 @@
                 <a:ea typeface="Microsoft YaHei" pitchFamily="34" charset="-122"/>
                 <a:cs typeface="Microsoft YaHei" pitchFamily="34" charset="-120"/>
               </a:rPr>
-              <a:t>•Node22 Windows下--test tests/报Cannot find module</a:t>
+              <a:t>•换个设备就撞单——规则写在了浏览器里</a:t>
             </a:r>
             <a:endParaRPr lang="en-US" sz="1000" dirty="0"/>
           </a:p>
@@ -3408,7 +3408,7 @@
                 <a:ea typeface="Microsoft YaHei" pitchFamily="34" charset="-122"/>
                 <a:cs typeface="Microsoft YaHei" pitchFamily="34" charset="-120"/>
               </a:rPr>
-              <a:t>•断言消息里await res.text()提前消费响应流</a:t>
+              <a:t>•按教程配的CI跑不起来</a:t>
             </a:r>
             <a:endParaRPr lang="en-US" sz="1000" dirty="0"/>
           </a:p>
@@ -3428,7 +3428,27 @@
                 <a:ea typeface="Microsoft YaHei" pitchFamily="34" charset="-122"/>
                 <a:cs typeface="Microsoft YaHei" pitchFamily="34" charset="-120"/>
               </a:rPr>
-              <a:t>•用例未清理残留数据，共用互斥键连锁409</a:t>
+              <a:t>•本地和线上同一个问题说两种话</a:t>
+            </a:r>
+            <a:endParaRPr lang="en-US" sz="1000" dirty="0"/>
+          </a:p>
+          <a:p>
+            <a:pPr indent="0" marL="0">
+              <a:lnSpc>
+                <a:spcPct val="130000"/>
+              </a:lnSpc>
+              <a:buNone/>
+            </a:pPr>
+            <a:r>
+              <a:rPr lang="en-US" sz="1000" dirty="0">
+                <a:solidFill>
+                  <a:srgbClr val="9CA3AF"/>
+                </a:solidFill>
+                <a:latin typeface="Microsoft YaHei" pitchFamily="34" charset="0"/>
+                <a:ea typeface="Microsoft YaHei" pitchFamily="34" charset="-122"/>
+                <a:cs typeface="Microsoft YaHei" pitchFamily="34" charset="-120"/>
+              </a:rPr>
+              <a:t>•测试连跑三次全挂，业务代码一行没改</a:t>
             </a:r>
             <a:endParaRPr lang="en-US" sz="1000" dirty="0"/>
           </a:p>
@@ -3492,7 +3512,7 @@
                 <a:ea typeface="Microsoft YaHei" pitchFamily="34" charset="-122"/>
                 <a:cs typeface="Microsoft YaHei" pitchFamily="34" charset="-120"/>
               </a:rPr>
-              <a:t>解决</a:t>
+              <a:t>我们改了什么</a:t>
             </a:r>
             <a:endParaRPr lang="en-US" sz="1000" dirty="0"/>
           </a:p>
@@ -3531,7 +3551,7 @@
                 <a:ea typeface="Microsoft YaHei" pitchFamily="34" charset="-122"/>
                 <a:cs typeface="Microsoft YaHei" pitchFamily="34" charset="-120"/>
               </a:rPr>
-              <a:t>改用例不改业务</a:t>
+              <a:t>只动必须动的，不碰已经对的</a:t>
             </a:r>
             <a:endParaRPr lang="en-US" sz="1300" dirty="0"/>
           </a:p>
@@ -3573,7 +3593,7 @@
                 <a:ea typeface="Microsoft YaHei" pitchFamily="34" charset="-122"/>
                 <a:cs typeface="Microsoft YaHei" pitchFamily="34" charset="-120"/>
               </a:rPr>
-              <a:t>•改--test tests/api.test.js</a:t>
+              <a:t>•把"不能撞"钉死在数据库</a:t>
             </a:r>
             <a:endParaRPr lang="en-US" sz="1000" dirty="0"/>
           </a:p>
@@ -3593,7 +3613,7 @@
                 <a:ea typeface="Microsoft YaHei" pitchFamily="34" charset="-122"/>
                 <a:cs typeface="Microsoft YaHei" pitchFamily="34" charset="-120"/>
               </a:rPr>
-              <a:t>•先读body再断言（createOk辅助函数）</a:t>
+              <a:t>•照Gitee Go的脾气重写配置</a:t>
             </a:r>
             <a:endParaRPr lang="en-US" sz="1000" dirty="0"/>
           </a:p>
@@ -3613,7 +3633,27 @@
                 <a:ea typeface="Microsoft YaHei" pitchFamily="34" charset="-122"/>
                 <a:cs typeface="Microsoft YaHei" pitchFamily="34" charset="-120"/>
               </a:rPr>
-              <a:t>•before钩子清库+用例try/finally自清</a:t>
+              <a:t>•统一两端的错误提示</a:t>
+            </a:r>
+            <a:endParaRPr lang="en-US" sz="1000" dirty="0"/>
+          </a:p>
+          <a:p>
+            <a:pPr indent="0" marL="0">
+              <a:lnSpc>
+                <a:spcPct val="130000"/>
+              </a:lnSpc>
+              <a:buNone/>
+            </a:pPr>
+            <a:r>
+              <a:rPr lang="en-US" sz="1000" dirty="0">
+                <a:solidFill>
+                  <a:srgbClr val="9CA3AF"/>
+                </a:solidFill>
+                <a:latin typeface="Microsoft YaHei" pitchFamily="34" charset="0"/>
+                <a:ea typeface="Microsoft YaHei" pitchFamily="34" charset="-122"/>
+                <a:cs typeface="Microsoft YaHei" pitchFamily="34" charset="-120"/>
+              </a:rPr>
+              <a:t>•测试脚本自己修，业务代码零改动</a:t>
             </a:r>
             <a:endParaRPr lang="en-US" sz="1000" dirty="0"/>
           </a:p>
@@ -3658,7 +3698,7 @@
                 <a:ea typeface="Microsoft YaHei" pitchFamily="34" charset="-122"/>
                 <a:cs typeface="Microsoft YaHei" pitchFamily="34" charset="-120"/>
               </a:rPr>
-              <a:t>5条业务规则全绿且连跑可重入；业务代码零改动。所有问题已闭环，现场能跑：https://caojunyue.pages.dev/</a:t>
+              <a:t>所有问题已闭环·5条测试全绿·现场能跑：https://caojunyue.pages.dev/</a:t>
             </a:r>
             <a:endParaRPr lang="en-US" sz="1000" dirty="0"/>
           </a:p>
